--- a/Presentacion.pptx
+++ b/Presentacion.pptx
@@ -284,6 +284,13 @@
           </p:nvPr>
         </p:nvSpPr>
         <p:spPr/>
+        <p:txBody>
+          <a:bodyPr/>
+          <a:lstStyle/>
+          <a:p>
+            <a:endParaRPr lang="es-ES"/>
+          </a:p>
+        </p:txBody>
       </p:sp>
       <p:sp>
         <p:nvSpPr>
@@ -368,6 +375,13 @@
           </p:nvPr>
         </p:nvSpPr>
         <p:spPr/>
+        <p:txBody>
+          <a:bodyPr/>
+          <a:lstStyle/>
+          <a:p>
+            <a:endParaRPr lang="es-ES"/>
+          </a:p>
+        </p:txBody>
       </p:sp>
       <p:sp>
         <p:nvSpPr>
@@ -452,6 +466,13 @@
           </p:nvPr>
         </p:nvSpPr>
         <p:spPr/>
+        <p:txBody>
+          <a:bodyPr/>
+          <a:lstStyle/>
+          <a:p>
+            <a:endParaRPr lang="es-ES"/>
+          </a:p>
+        </p:txBody>
       </p:sp>
       <p:sp>
         <p:nvSpPr>
@@ -536,6 +557,13 @@
           </p:nvPr>
         </p:nvSpPr>
         <p:spPr/>
+        <p:txBody>
+          <a:bodyPr/>
+          <a:lstStyle/>
+          <a:p>
+            <a:endParaRPr lang="es-ES"/>
+          </a:p>
+        </p:txBody>
       </p:sp>
       <p:sp>
         <p:nvSpPr>
@@ -620,6 +648,13 @@
           </p:nvPr>
         </p:nvSpPr>
         <p:spPr/>
+        <p:txBody>
+          <a:bodyPr/>
+          <a:lstStyle/>
+          <a:p>
+            <a:endParaRPr lang="es-ES"/>
+          </a:p>
+        </p:txBody>
       </p:sp>
       <p:sp>
         <p:nvSpPr>
@@ -704,6 +739,13 @@
           </p:nvPr>
         </p:nvSpPr>
         <p:spPr/>
+        <p:txBody>
+          <a:bodyPr/>
+          <a:lstStyle/>
+          <a:p>
+            <a:endParaRPr lang="es-ES"/>
+          </a:p>
+        </p:txBody>
       </p:sp>
       <p:sp>
         <p:nvSpPr>
@@ -788,6 +830,13 @@
           </p:nvPr>
         </p:nvSpPr>
         <p:spPr/>
+        <p:txBody>
+          <a:bodyPr/>
+          <a:lstStyle/>
+          <a:p>
+            <a:endParaRPr lang="es-ES"/>
+          </a:p>
+        </p:txBody>
       </p:sp>
       <p:sp>
         <p:nvSpPr>
@@ -872,6 +921,13 @@
           </p:nvPr>
         </p:nvSpPr>
         <p:spPr/>
+        <p:txBody>
+          <a:bodyPr/>
+          <a:lstStyle/>
+          <a:p>
+            <a:endParaRPr lang="es-ES"/>
+          </a:p>
+        </p:txBody>
       </p:sp>
       <p:sp>
         <p:nvSpPr>
@@ -956,6 +1012,13 @@
           </p:nvPr>
         </p:nvSpPr>
         <p:spPr/>
+        <p:txBody>
+          <a:bodyPr/>
+          <a:lstStyle/>
+          <a:p>
+            <a:endParaRPr lang="es-ES"/>
+          </a:p>
+        </p:txBody>
       </p:sp>
       <p:sp>
         <p:nvSpPr>
@@ -1040,6 +1103,13 @@
           </p:nvPr>
         </p:nvSpPr>
         <p:spPr/>
+        <p:txBody>
+          <a:bodyPr/>
+          <a:lstStyle/>
+          <a:p>
+            <a:endParaRPr lang="es-ES"/>
+          </a:p>
+        </p:txBody>
       </p:sp>
       <p:sp>
         <p:nvSpPr>
@@ -1124,6 +1194,13 @@
           </p:nvPr>
         </p:nvSpPr>
         <p:spPr/>
+        <p:txBody>
+          <a:bodyPr/>
+          <a:lstStyle/>
+          <a:p>
+            <a:endParaRPr lang="es-ES"/>
+          </a:p>
+        </p:txBody>
       </p:sp>
       <p:sp>
         <p:nvSpPr>
@@ -1208,6 +1285,13 @@
           </p:nvPr>
         </p:nvSpPr>
         <p:spPr/>
+        <p:txBody>
+          <a:bodyPr/>
+          <a:lstStyle/>
+          <a:p>
+            <a:endParaRPr lang="es-ES"/>
+          </a:p>
+        </p:txBody>
       </p:sp>
       <p:sp>
         <p:nvSpPr>
@@ -1292,6 +1376,13 @@
           </p:nvPr>
         </p:nvSpPr>
         <p:spPr/>
+        <p:txBody>
+          <a:bodyPr/>
+          <a:lstStyle/>
+          <a:p>
+            <a:endParaRPr lang="es-ES"/>
+          </a:p>
+        </p:txBody>
       </p:sp>
       <p:sp>
         <p:nvSpPr>
@@ -1376,6 +1467,13 @@
           </p:nvPr>
         </p:nvSpPr>
         <p:spPr/>
+        <p:txBody>
+          <a:bodyPr/>
+          <a:lstStyle/>
+          <a:p>
+            <a:endParaRPr lang="es-ES"/>
+          </a:p>
+        </p:txBody>
       </p:sp>
       <p:sp>
         <p:nvSpPr>
@@ -1460,6 +1558,13 @@
           </p:nvPr>
         </p:nvSpPr>
         <p:spPr/>
+        <p:txBody>
+          <a:bodyPr/>
+          <a:lstStyle/>
+          <a:p>
+            <a:endParaRPr lang="es-ES"/>
+          </a:p>
+        </p:txBody>
       </p:sp>
       <p:sp>
         <p:nvSpPr>
@@ -1544,6 +1649,13 @@
           </p:nvPr>
         </p:nvSpPr>
         <p:spPr/>
+        <p:txBody>
+          <a:bodyPr/>
+          <a:lstStyle/>
+          <a:p>
+            <a:endParaRPr lang="es-ES"/>
+          </a:p>
+        </p:txBody>
       </p:sp>
       <p:sp>
         <p:nvSpPr>
@@ -1628,6 +1740,13 @@
           </p:nvPr>
         </p:nvSpPr>
         <p:spPr/>
+        <p:txBody>
+          <a:bodyPr/>
+          <a:lstStyle/>
+          <a:p>
+            <a:endParaRPr lang="es-ES"/>
+          </a:p>
+        </p:txBody>
       </p:sp>
       <p:sp>
         <p:nvSpPr>
@@ -1712,6 +1831,13 @@
           </p:nvPr>
         </p:nvSpPr>
         <p:spPr/>
+        <p:txBody>
+          <a:bodyPr/>
+          <a:lstStyle/>
+          <a:p>
+            <a:endParaRPr lang="es-ES"/>
+          </a:p>
+        </p:txBody>
       </p:sp>
       <p:sp>
         <p:nvSpPr>
@@ -1796,6 +1922,13 @@
           </p:nvPr>
         </p:nvSpPr>
         <p:spPr/>
+        <p:txBody>
+          <a:bodyPr/>
+          <a:lstStyle/>
+          <a:p>
+            <a:endParaRPr lang="es-ES"/>
+          </a:p>
+        </p:txBody>
       </p:sp>
       <p:sp>
         <p:nvSpPr>
@@ -9817,7 +9950,29 @@
                 <a:ea typeface="Calibri" pitchFamily="34" charset="-122"/>
                 <a:cs typeface="Calibri" pitchFamily="34" charset="-120"/>
               </a:rPr>
-              <a:t>Flask recibe la petición, valida la sesión del usuario, determina la acción (reproducir, subir, descargar, gestionar playlist) y consulta MySQL para obtener o actualizar metadatos.</a:t>
+              <a:t>Flask recibe la petición, valida la sesión del usuario, determina la acción (</a:t>
+            </a:r>
+            <a:r>
+              <a:rPr lang="en-US" sz="900" dirty="0" err="1">
+                <a:solidFill>
+                  <a:srgbClr val="8B949E"/>
+                </a:solidFill>
+                <a:latin typeface="Calibri" pitchFamily="34" charset="0"/>
+                <a:ea typeface="Calibri" pitchFamily="34" charset="-122"/>
+                <a:cs typeface="Calibri" pitchFamily="34" charset="-120"/>
+              </a:rPr>
+              <a:t>reproducir</a:t>
+            </a:r>
+            <a:r>
+              <a:rPr lang="en-US" sz="900" dirty="0">
+                <a:solidFill>
+                  <a:srgbClr val="8B949E"/>
+                </a:solidFill>
+                <a:latin typeface="Calibri" pitchFamily="34" charset="0"/>
+                <a:ea typeface="Calibri" pitchFamily="34" charset="-122"/>
+                <a:cs typeface="Calibri" pitchFamily="34" charset="-120"/>
+              </a:rPr>
+              <a:t>, subir, descargar, gestionar playlist) y consulta MySQL para obtener o actualizar metadatos.</a:t>
             </a:r>
             <a:endParaRPr lang="en-US" sz="900" dirty="0"/>
           </a:p>
@@ -11618,7 +11773,7 @@
         <p:spPr>
           <a:xfrm>
             <a:off x="320040" y="1005840"/>
-            <a:ext cx="4114800" cy="1965960"/>
+            <a:ext cx="4114800" cy="2048256"/>
           </a:xfrm>
           <a:prstGeom prst="rect">
             <a:avLst/>
@@ -12653,8 +12808,8 @@
         </p:nvSpPr>
         <p:spPr>
           <a:xfrm>
-            <a:off x="4663440" y="1005840"/>
-            <a:ext cx="4114800" cy="1965960"/>
+            <a:off x="4663440" y="1005839"/>
+            <a:ext cx="4114800" cy="2048255"/>
           </a:xfrm>
           <a:prstGeom prst="rect">
             <a:avLst/>
@@ -15336,8 +15491,8 @@
         </p:nvSpPr>
         <p:spPr>
           <a:xfrm>
-            <a:off x="4663440" y="1005840"/>
-            <a:ext cx="4114800" cy="1163160"/>
+            <a:off x="4663440" y="1005839"/>
+            <a:ext cx="4114800" cy="1564559"/>
           </a:xfrm>
           <a:prstGeom prst="rect">
             <a:avLst/>
@@ -16626,40 +16781,6 @@
       </p:sp>
       <p:sp>
         <p:nvSpPr>
-          <p:cNvPr id="5" name="Shape 3"/>
-          <p:cNvSpPr/>
-          <p:nvPr/>
-        </p:nvSpPr>
-        <p:spPr>
-          <a:xfrm>
-            <a:off x="320040" y="1417320"/>
-            <a:ext cx="8503920" cy="3611880"/>
-          </a:xfrm>
-          <a:prstGeom prst="rect">
-            <a:avLst/>
-          </a:prstGeom>
-          <a:solidFill>
-            <a:srgbClr val="0A0E14"/>
-          </a:solidFill>
-          <a:ln/>
-          <a:effectLst>
-            <a:outerShdw blurRad="127000" dist="38100" dir="8100000" algn="bl" rotWithShape="0">
-              <a:srgbClr val="000000">
-                <a:alpha val="35000"/>
-              </a:srgbClr>
-            </a:outerShdw>
-          </a:effectLst>
-        </p:spPr>
-        <p:txBody>
-          <a:bodyPr/>
-          <a:lstStyle/>
-          <a:p>
-            <a:endParaRPr lang="es-ES"/>
-          </a:p>
-        </p:txBody>
-      </p:sp>
-      <p:sp>
-        <p:nvSpPr>
           <p:cNvPr id="6" name="Text 4"/>
           <p:cNvSpPr/>
           <p:nvPr/>
@@ -16855,14 +16976,14 @@
       </p:sp>
       <p:sp>
         <p:nvSpPr>
-          <p:cNvPr id="11" name="Text 9"/>
-          <p:cNvSpPr/>
-          <p:nvPr/>
-        </p:nvSpPr>
-        <p:spPr>
-          <a:xfrm>
-            <a:off x="1097280" y="2491740"/>
-            <a:ext cx="7589520" cy="182880"/>
+          <p:cNvPr id="19" name="Text 17"/>
+          <p:cNvSpPr/>
+          <p:nvPr/>
+        </p:nvSpPr>
+        <p:spPr>
+          <a:xfrm>
+            <a:off x="777240" y="4092347"/>
+            <a:ext cx="7909560" cy="182880"/>
           </a:xfrm>
           <a:prstGeom prst="rect">
             <a:avLst/>
@@ -16880,13 +17001,13 @@
             <a:r>
               <a:rPr lang="en-US" sz="850" dirty="0">
                 <a:solidFill>
-                  <a:srgbClr val="E6EDF3"/>
+                  <a:srgbClr val="2563EB"/>
                 </a:solidFill>
                 <a:latin typeface="Consolas" pitchFamily="34" charset="0"/>
                 <a:ea typeface="Consolas" pitchFamily="34" charset="-122"/>
                 <a:cs typeface="Consolas" pitchFamily="34" charset="-120"/>
               </a:rPr>
-              <a:t>app.py                  ← Punto de entrada Flask</a:t>
+              <a:t>docker-compose.yml      ← Orquestación de contenedores</a:t>
             </a:r>
             <a:endParaRPr lang="en-US" sz="850" dirty="0"/>
           </a:p>
@@ -16894,14 +17015,14 @@
       </p:sp>
       <p:sp>
         <p:nvSpPr>
-          <p:cNvPr id="12" name="Text 10"/>
-          <p:cNvSpPr/>
-          <p:nvPr/>
-        </p:nvSpPr>
-        <p:spPr>
-          <a:xfrm>
-            <a:off x="1097280" y="2688336"/>
-            <a:ext cx="7589520" cy="182880"/>
+          <p:cNvPr id="20" name="Text 18"/>
+          <p:cNvSpPr/>
+          <p:nvPr/>
+        </p:nvSpPr>
+        <p:spPr>
+          <a:xfrm>
+            <a:off x="777240" y="4261104"/>
+            <a:ext cx="7909560" cy="182880"/>
           </a:xfrm>
           <a:prstGeom prst="rect">
             <a:avLst/>
@@ -16919,13 +17040,13 @@
             <a:r>
               <a:rPr lang="en-US" sz="850" dirty="0">
                 <a:solidFill>
-                  <a:srgbClr val="E6EDF3"/>
+                  <a:srgbClr val="2563EB"/>
                 </a:solidFill>
                 <a:latin typeface="Consolas" pitchFamily="34" charset="0"/>
                 <a:ea typeface="Consolas" pitchFamily="34" charset="-122"/>
                 <a:cs typeface="Consolas" pitchFamily="34" charset="-120"/>
               </a:rPr>
-              <a:t>auth.py                 ← Login, registro, sesiones</a:t>
+              <a:t>Dockerfile              ← Imagen servidor Flask</a:t>
             </a:r>
             <a:endParaRPr lang="en-US" sz="850" dirty="0"/>
           </a:p>
@@ -16933,14 +17054,14 @@
       </p:sp>
       <p:sp>
         <p:nvSpPr>
-          <p:cNvPr id="13" name="Text 11"/>
-          <p:cNvSpPr/>
-          <p:nvPr/>
-        </p:nvSpPr>
-        <p:spPr>
-          <a:xfrm>
-            <a:off x="1097280" y="2884932"/>
-            <a:ext cx="7589520" cy="182880"/>
+          <p:cNvPr id="21" name="Text 19"/>
+          <p:cNvSpPr/>
+          <p:nvPr/>
+        </p:nvSpPr>
+        <p:spPr>
+          <a:xfrm>
+            <a:off x="777240" y="4457700"/>
+            <a:ext cx="7909560" cy="182880"/>
           </a:xfrm>
           <a:prstGeom prst="rect">
             <a:avLst/>
@@ -16958,13 +17079,13 @@
             <a:r>
               <a:rPr lang="en-US" sz="850" dirty="0">
                 <a:solidFill>
-                  <a:srgbClr val="E6EDF3"/>
+                  <a:srgbClr val="2563EB"/>
                 </a:solidFill>
                 <a:latin typeface="Consolas" pitchFamily="34" charset="0"/>
                 <a:ea typeface="Consolas" pitchFamily="34" charset="-122"/>
                 <a:cs typeface="Consolas" pitchFamily="34" charset="-120"/>
               </a:rPr>
-              <a:t>songs.py                ← CRUD canciones + streaming</a:t>
+              <a:t>Dockerfile.tests        ← Imagen contenedor tests</a:t>
             </a:r>
             <a:endParaRPr lang="en-US" sz="850" dirty="0"/>
           </a:p>
@@ -16972,14 +17093,14 @@
       </p:sp>
       <p:sp>
         <p:nvSpPr>
-          <p:cNvPr id="14" name="Text 12"/>
-          <p:cNvSpPr/>
-          <p:nvPr/>
-        </p:nvSpPr>
-        <p:spPr>
-          <a:xfrm>
-            <a:off x="1097280" y="3081528"/>
-            <a:ext cx="7589520" cy="182880"/>
+          <p:cNvPr id="22" name="Text 20"/>
+          <p:cNvSpPr/>
+          <p:nvPr/>
+        </p:nvSpPr>
+        <p:spPr>
+          <a:xfrm>
+            <a:off x="777240" y="4654296"/>
+            <a:ext cx="7909560" cy="182880"/>
           </a:xfrm>
           <a:prstGeom prst="rect">
             <a:avLst/>
@@ -16997,13 +17118,13 @@
             <a:r>
               <a:rPr lang="en-US" sz="850" dirty="0">
                 <a:solidFill>
-                  <a:srgbClr val="E6EDF3"/>
+                  <a:srgbClr val="8B949E"/>
                 </a:solidFill>
                 <a:latin typeface="Consolas" pitchFamily="34" charset="0"/>
                 <a:ea typeface="Consolas" pitchFamily="34" charset="-122"/>
                 <a:cs typeface="Consolas" pitchFamily="34" charset="-120"/>
               </a:rPr>
-              <a:t>playlists.py            ← Gestión de playlists</a:t>
+              <a:t>requirements.txt        ← Dependencias Python</a:t>
             </a:r>
             <a:endParaRPr lang="en-US" sz="850" dirty="0"/>
           </a:p>
@@ -17011,14 +17132,14 @@
       </p:sp>
       <p:sp>
         <p:nvSpPr>
-          <p:cNvPr id="15" name="Text 13"/>
-          <p:cNvSpPr/>
-          <p:nvPr/>
-        </p:nvSpPr>
-        <p:spPr>
-          <a:xfrm>
-            <a:off x="1097280" y="3278124"/>
-            <a:ext cx="7589520" cy="182880"/>
+          <p:cNvPr id="23" name="Text 21"/>
+          <p:cNvSpPr/>
+          <p:nvPr/>
+        </p:nvSpPr>
+        <p:spPr>
+          <a:xfrm>
+            <a:off x="777240" y="4850892"/>
+            <a:ext cx="7909560" cy="182880"/>
           </a:xfrm>
           <a:prstGeom prst="rect">
             <a:avLst/>
@@ -17036,13 +17157,13 @@
             <a:r>
               <a:rPr lang="en-US" sz="850" dirty="0">
                 <a:solidFill>
-                  <a:srgbClr val="E6EDF3"/>
+                  <a:srgbClr val="8B949E"/>
                 </a:solidFill>
                 <a:latin typeface="Consolas" pitchFamily="34" charset="0"/>
                 <a:ea typeface="Consolas" pitchFamily="34" charset="-122"/>
                 <a:cs typeface="Consolas" pitchFamily="34" charset="-120"/>
               </a:rPr>
-              <a:t>downloader.py           ← Integración yt-dlp</a:t>
+              <a:t>Memoria.docx            ← Documentación del TFG</a:t>
             </a:r>
             <a:endParaRPr lang="en-US" sz="850" dirty="0"/>
           </a:p>
@@ -17050,14 +17171,20 @@
       </p:sp>
       <p:sp>
         <p:nvSpPr>
-          <p:cNvPr id="16" name="Text 14"/>
-          <p:cNvSpPr/>
-          <p:nvPr/>
-        </p:nvSpPr>
-        <p:spPr>
-          <a:xfrm>
-            <a:off x="1097280" y="3474720"/>
-            <a:ext cx="7589520" cy="182880"/>
+          <p:cNvPr id="24" name="Text 8">
+            <a:extLst>
+              <a:ext uri="{FF2B5EF4-FFF2-40B4-BE49-F238E27FC236}">
+                <a16:creationId xmlns:a16="http://schemas.microsoft.com/office/drawing/2014/main" id="{5501A976-BE7D-C28D-D2ED-669F16264995}"/>
+              </a:ext>
+            </a:extLst>
+          </p:cNvPr>
+          <p:cNvSpPr/>
+          <p:nvPr/>
+        </p:nvSpPr>
+        <p:spPr>
+          <a:xfrm>
+            <a:off x="937260" y="2453097"/>
+            <a:ext cx="7909560" cy="182880"/>
           </a:xfrm>
           <a:prstGeom prst="rect">
             <a:avLst/>
@@ -17075,130 +17202,46 @@
             <a:r>
               <a:rPr lang="en-US" sz="850" dirty="0">
                 <a:solidFill>
-                  <a:srgbClr val="E6EDF3"/>
+                  <a:srgbClr val="00A896"/>
                 </a:solidFill>
                 <a:latin typeface="Consolas" pitchFamily="34" charset="0"/>
                 <a:ea typeface="Consolas" pitchFamily="34" charset="-122"/>
                 <a:cs typeface="Consolas" pitchFamily="34" charset="-120"/>
               </a:rPr>
-              <a:t>database.py             ← Conexión y queries MySQL</a:t>
-            </a:r>
-            <a:endParaRPr lang="en-US" sz="850" dirty="0"/>
-          </a:p>
-        </p:txBody>
-      </p:sp>
-      <p:sp>
-        <p:nvSpPr>
-          <p:cNvPr id="17" name="Text 15"/>
-          <p:cNvSpPr/>
-          <p:nvPr/>
-        </p:nvSpPr>
-        <p:spPr>
-          <a:xfrm>
-            <a:off x="1097280" y="3671316"/>
-            <a:ext cx="7589520" cy="182880"/>
-          </a:xfrm>
-          <a:prstGeom prst="rect">
-            <a:avLst/>
-          </a:prstGeom>
-          <a:noFill/>
-          <a:ln/>
-        </p:spPr>
-        <p:txBody>
-          <a:bodyPr wrap="square" lIns="0" tIns="0" rIns="0" bIns="0" rtlCol="0" anchor="ctr"/>
-          <a:lstStyle/>
-          <a:p>
-            <a:pPr marL="0" indent="0">
-              <a:buNone/>
-            </a:pPr>
-            <a:r>
-              <a:rPr lang="en-US" sz="850" dirty="0">
-                <a:solidFill>
-                  <a:srgbClr val="8B949E"/>
+              <a:t>database/                    ← Código para </a:t>
+            </a:r>
+            <a:r>
+              <a:rPr lang="en-US" sz="850" dirty="0" err="1">
+                <a:solidFill>
+                  <a:srgbClr val="00A896"/>
                 </a:solidFill>
                 <a:latin typeface="Consolas" pitchFamily="34" charset="0"/>
                 <a:ea typeface="Consolas" pitchFamily="34" charset="-122"/>
                 <a:cs typeface="Consolas" pitchFamily="34" charset="-120"/>
               </a:rPr>
-              <a:t>music/                  ← Archivos de audio (volumen Docker)</a:t>
-            </a:r>
-            <a:endParaRPr lang="en-US" sz="850" dirty="0"/>
-          </a:p>
-        </p:txBody>
-      </p:sp>
-      <p:sp>
-        <p:nvSpPr>
-          <p:cNvPr id="18" name="Text 16"/>
-          <p:cNvSpPr/>
-          <p:nvPr/>
-        </p:nvSpPr>
-        <p:spPr>
-          <a:xfrm>
-            <a:off x="1097280" y="3867912"/>
-            <a:ext cx="7589520" cy="182880"/>
-          </a:xfrm>
-          <a:prstGeom prst="rect">
-            <a:avLst/>
-          </a:prstGeom>
-          <a:noFill/>
-          <a:ln/>
-        </p:spPr>
-        <p:txBody>
-          <a:bodyPr wrap="square" lIns="0" tIns="0" rIns="0" bIns="0" rtlCol="0" anchor="ctr"/>
-          <a:lstStyle/>
-          <a:p>
-            <a:pPr marL="0" indent="0">
-              <a:buNone/>
-            </a:pPr>
+              <a:t>conexión</a:t>
+            </a:r>
             <a:r>
               <a:rPr lang="en-US" sz="850" dirty="0">
                 <a:solidFill>
-                  <a:srgbClr val="8B949E"/>
+                  <a:srgbClr val="00A896"/>
                 </a:solidFill>
                 <a:latin typeface="Consolas" pitchFamily="34" charset="0"/>
                 <a:ea typeface="Consolas" pitchFamily="34" charset="-122"/>
                 <a:cs typeface="Consolas" pitchFamily="34" charset="-120"/>
               </a:rPr>
-              <a:t>tests/                  ← Suite de tests pytest</a:t>
-            </a:r>
-            <a:endParaRPr lang="en-US" sz="850" dirty="0"/>
-          </a:p>
-        </p:txBody>
-      </p:sp>
-      <p:sp>
-        <p:nvSpPr>
-          <p:cNvPr id="19" name="Text 17"/>
-          <p:cNvSpPr/>
-          <p:nvPr/>
-        </p:nvSpPr>
-        <p:spPr>
-          <a:xfrm>
-            <a:off x="777240" y="4064508"/>
-            <a:ext cx="7909560" cy="182880"/>
-          </a:xfrm>
-          <a:prstGeom prst="rect">
-            <a:avLst/>
-          </a:prstGeom>
-          <a:noFill/>
-          <a:ln/>
-        </p:spPr>
-        <p:txBody>
-          <a:bodyPr wrap="square" lIns="0" tIns="0" rIns="0" bIns="0" rtlCol="0" anchor="ctr"/>
-          <a:lstStyle/>
-          <a:p>
-            <a:pPr marL="0" indent="0">
-              <a:buNone/>
-            </a:pPr>
-            <a:r>
-              <a:rPr lang="en-US" sz="850" dirty="0">
-                <a:solidFill>
-                  <a:srgbClr val="2563EB"/>
+              <a:t> con base de </a:t>
+            </a:r>
+            <a:r>
+              <a:rPr lang="en-US" sz="850" dirty="0" err="1">
+                <a:solidFill>
+                  <a:srgbClr val="00A896"/>
                 </a:solidFill>
                 <a:latin typeface="Consolas" pitchFamily="34" charset="0"/>
                 <a:ea typeface="Consolas" pitchFamily="34" charset="-122"/>
                 <a:cs typeface="Consolas" pitchFamily="34" charset="-120"/>
               </a:rPr>
-              <a:t>docker-compose.yml      ← Orquestación de contenedores</a:t>
+              <a:t>datos</a:t>
             </a:r>
             <a:endParaRPr lang="en-US" sz="850" dirty="0"/>
           </a:p>
@@ -17206,13 +17249,19 @@
       </p:sp>
       <p:sp>
         <p:nvSpPr>
-          <p:cNvPr id="20" name="Text 18"/>
-          <p:cNvSpPr/>
-          <p:nvPr/>
-        </p:nvSpPr>
-        <p:spPr>
-          <a:xfrm>
-            <a:off x="777240" y="4261104"/>
+          <p:cNvPr id="25" name="Text 8">
+            <a:extLst>
+              <a:ext uri="{FF2B5EF4-FFF2-40B4-BE49-F238E27FC236}">
+                <a16:creationId xmlns:a16="http://schemas.microsoft.com/office/drawing/2014/main" id="{5C47A712-DC1E-8E03-E7B3-B699714CE9B8}"/>
+              </a:ext>
+            </a:extLst>
+          </p:cNvPr>
+          <p:cNvSpPr/>
+          <p:nvPr/>
+        </p:nvSpPr>
+        <p:spPr>
+          <a:xfrm>
+            <a:off x="937260" y="2663409"/>
             <a:ext cx="7909560" cy="182880"/>
           </a:xfrm>
           <a:prstGeom prst="rect">
@@ -17231,130 +17280,878 @@
             <a:r>
               <a:rPr lang="en-US" sz="850" dirty="0">
                 <a:solidFill>
-                  <a:srgbClr val="2563EB"/>
+                  <a:srgbClr val="00A896"/>
                 </a:solidFill>
                 <a:latin typeface="Consolas" pitchFamily="34" charset="0"/>
                 <a:ea typeface="Consolas" pitchFamily="34" charset="-122"/>
                 <a:cs typeface="Consolas" pitchFamily="34" charset="-120"/>
               </a:rPr>
-              <a:t>Dockerfile              ← Imagen servidor Flask</a:t>
-            </a:r>
-            <a:endParaRPr lang="en-US" sz="850" dirty="0"/>
-          </a:p>
-        </p:txBody>
-      </p:sp>
-      <p:sp>
-        <p:nvSpPr>
-          <p:cNvPr id="21" name="Text 19"/>
-          <p:cNvSpPr/>
-          <p:nvPr/>
-        </p:nvSpPr>
-        <p:spPr>
-          <a:xfrm>
-            <a:off x="777240" y="4457700"/>
-            <a:ext cx="7909560" cy="182880"/>
-          </a:xfrm>
-          <a:prstGeom prst="rect">
-            <a:avLst/>
-          </a:prstGeom>
-          <a:noFill/>
-          <a:ln/>
-        </p:spPr>
-        <p:txBody>
-          <a:bodyPr wrap="square" lIns="0" tIns="0" rIns="0" bIns="0" rtlCol="0" anchor="ctr"/>
-          <a:lstStyle/>
-          <a:p>
-            <a:pPr marL="0" indent="0">
-              <a:buNone/>
-            </a:pPr>
-            <a:r>
-              <a:rPr lang="en-US" sz="850" dirty="0">
-                <a:solidFill>
-                  <a:srgbClr val="2563EB"/>
+              <a:t>music/                       ← </a:t>
+            </a:r>
+            <a:r>
+              <a:rPr lang="en-US" sz="850" dirty="0" err="1">
+                <a:solidFill>
+                  <a:srgbClr val="00A896"/>
                 </a:solidFill>
                 <a:latin typeface="Consolas" pitchFamily="34" charset="0"/>
                 <a:ea typeface="Consolas" pitchFamily="34" charset="-122"/>
                 <a:cs typeface="Consolas" pitchFamily="34" charset="-120"/>
               </a:rPr>
-              <a:t>Dockerfile.tests        ← Imagen contenedor tests</a:t>
-            </a:r>
-            <a:endParaRPr lang="en-US" sz="850" dirty="0"/>
-          </a:p>
-        </p:txBody>
-      </p:sp>
-      <p:sp>
-        <p:nvSpPr>
-          <p:cNvPr id="22" name="Text 20"/>
-          <p:cNvSpPr/>
-          <p:nvPr/>
-        </p:nvSpPr>
-        <p:spPr>
-          <a:xfrm>
-            <a:off x="777240" y="4654296"/>
-            <a:ext cx="7909560" cy="182880"/>
-          </a:xfrm>
-          <a:prstGeom prst="rect">
-            <a:avLst/>
-          </a:prstGeom>
-          <a:noFill/>
-          <a:ln/>
-        </p:spPr>
-        <p:txBody>
-          <a:bodyPr wrap="square" lIns="0" tIns="0" rIns="0" bIns="0" rtlCol="0" anchor="ctr"/>
-          <a:lstStyle/>
-          <a:p>
-            <a:pPr marL="0" indent="0">
-              <a:buNone/>
-            </a:pPr>
+              <a:t>Carpeta</a:t>
+            </a:r>
             <a:r>
               <a:rPr lang="en-US" sz="850" dirty="0">
                 <a:solidFill>
-                  <a:srgbClr val="8B949E"/>
+                  <a:srgbClr val="00A896"/>
                 </a:solidFill>
                 <a:latin typeface="Consolas" pitchFamily="34" charset="0"/>
                 <a:ea typeface="Consolas" pitchFamily="34" charset="-122"/>
                 <a:cs typeface="Consolas" pitchFamily="34" charset="-120"/>
               </a:rPr>
-              <a:t>requirements.txt        ← Dependencias Python</a:t>
-            </a:r>
-            <a:endParaRPr lang="en-US" sz="850" dirty="0"/>
-          </a:p>
-        </p:txBody>
-      </p:sp>
-      <p:sp>
-        <p:nvSpPr>
-          <p:cNvPr id="23" name="Text 21"/>
-          <p:cNvSpPr/>
-          <p:nvPr/>
-        </p:nvSpPr>
-        <p:spPr>
-          <a:xfrm>
-            <a:off x="777240" y="4850892"/>
-            <a:ext cx="7909560" cy="182880"/>
-          </a:xfrm>
-          <a:prstGeom prst="rect">
-            <a:avLst/>
-          </a:prstGeom>
-          <a:noFill/>
-          <a:ln/>
-        </p:spPr>
-        <p:txBody>
-          <a:bodyPr wrap="square" lIns="0" tIns="0" rIns="0" bIns="0" rtlCol="0" anchor="ctr"/>
-          <a:lstStyle/>
-          <a:p>
-            <a:pPr marL="0" indent="0">
-              <a:buNone/>
-            </a:pPr>
-            <a:r>
-              <a:rPr lang="en-US" sz="850" dirty="0">
-                <a:solidFill>
-                  <a:srgbClr val="8B949E"/>
+              <a:t> </a:t>
+            </a:r>
+            <a:r>
+              <a:rPr lang="en-US" sz="850" dirty="0" err="1">
+                <a:solidFill>
+                  <a:srgbClr val="00A896"/>
                 </a:solidFill>
                 <a:latin typeface="Consolas" pitchFamily="34" charset="0"/>
                 <a:ea typeface="Consolas" pitchFamily="34" charset="-122"/>
                 <a:cs typeface="Consolas" pitchFamily="34" charset="-120"/>
               </a:rPr>
-              <a:t>Memoria.docx            ← Documentación del TFG</a:t>
+              <a:t>que</a:t>
+            </a:r>
+            <a:r>
+              <a:rPr lang="en-US" sz="850" dirty="0">
+                <a:solidFill>
+                  <a:srgbClr val="00A896"/>
+                </a:solidFill>
+                <a:latin typeface="Consolas" pitchFamily="34" charset="0"/>
+                <a:ea typeface="Consolas" pitchFamily="34" charset="-122"/>
+                <a:cs typeface="Consolas" pitchFamily="34" charset="-120"/>
+              </a:rPr>
+              <a:t> </a:t>
+            </a:r>
+            <a:r>
+              <a:rPr lang="en-US" sz="850" dirty="0" err="1">
+                <a:solidFill>
+                  <a:srgbClr val="00A896"/>
+                </a:solidFill>
+                <a:latin typeface="Consolas" pitchFamily="34" charset="0"/>
+                <a:ea typeface="Consolas" pitchFamily="34" charset="-122"/>
+                <a:cs typeface="Consolas" pitchFamily="34" charset="-120"/>
+              </a:rPr>
+              <a:t>almacenara</a:t>
+            </a:r>
+            <a:r>
+              <a:rPr lang="en-US" sz="850" dirty="0">
+                <a:solidFill>
+                  <a:srgbClr val="00A896"/>
+                </a:solidFill>
+                <a:latin typeface="Consolas" pitchFamily="34" charset="0"/>
+                <a:ea typeface="Consolas" pitchFamily="34" charset="-122"/>
+                <a:cs typeface="Consolas" pitchFamily="34" charset="-120"/>
+              </a:rPr>
+              <a:t> </a:t>
+            </a:r>
+            <a:r>
+              <a:rPr lang="en-US" sz="850" dirty="0" err="1">
+                <a:solidFill>
+                  <a:srgbClr val="00A896"/>
+                </a:solidFill>
+                <a:latin typeface="Consolas" pitchFamily="34" charset="0"/>
+                <a:ea typeface="Consolas" pitchFamily="34" charset="-122"/>
+                <a:cs typeface="Consolas" pitchFamily="34" charset="-120"/>
+              </a:rPr>
+              <a:t>los</a:t>
+            </a:r>
+            <a:r>
+              <a:rPr lang="en-US" sz="850" dirty="0">
+                <a:solidFill>
+                  <a:srgbClr val="00A896"/>
+                </a:solidFill>
+                <a:latin typeface="Consolas" pitchFamily="34" charset="0"/>
+                <a:ea typeface="Consolas" pitchFamily="34" charset="-122"/>
+                <a:cs typeface="Consolas" pitchFamily="34" charset="-120"/>
+              </a:rPr>
+              <a:t> </a:t>
+            </a:r>
+            <a:r>
+              <a:rPr lang="en-US" sz="850" dirty="0" err="1">
+                <a:solidFill>
+                  <a:srgbClr val="00A896"/>
+                </a:solidFill>
+                <a:latin typeface="Consolas" pitchFamily="34" charset="0"/>
+                <a:ea typeface="Consolas" pitchFamily="34" charset="-122"/>
+                <a:cs typeface="Consolas" pitchFamily="34" charset="-120"/>
+              </a:rPr>
+              <a:t>directorios</a:t>
+            </a:r>
+            <a:r>
+              <a:rPr lang="en-US" sz="850" dirty="0">
+                <a:solidFill>
+                  <a:srgbClr val="00A896"/>
+                </a:solidFill>
+                <a:latin typeface="Consolas" pitchFamily="34" charset="0"/>
+                <a:ea typeface="Consolas" pitchFamily="34" charset="-122"/>
+                <a:cs typeface="Consolas" pitchFamily="34" charset="-120"/>
+              </a:rPr>
+              <a:t> de </a:t>
+            </a:r>
+            <a:r>
+              <a:rPr lang="en-US" sz="850" dirty="0" err="1">
+                <a:solidFill>
+                  <a:srgbClr val="00A896"/>
+                </a:solidFill>
+                <a:latin typeface="Consolas" pitchFamily="34" charset="0"/>
+                <a:ea typeface="Consolas" pitchFamily="34" charset="-122"/>
+                <a:cs typeface="Consolas" pitchFamily="34" charset="-120"/>
+              </a:rPr>
+              <a:t>cada</a:t>
+            </a:r>
+            <a:r>
+              <a:rPr lang="en-US" sz="850" dirty="0">
+                <a:solidFill>
+                  <a:srgbClr val="00A896"/>
+                </a:solidFill>
+                <a:latin typeface="Consolas" pitchFamily="34" charset="0"/>
+                <a:ea typeface="Consolas" pitchFamily="34" charset="-122"/>
+                <a:cs typeface="Consolas" pitchFamily="34" charset="-120"/>
+              </a:rPr>
+              <a:t> </a:t>
+            </a:r>
+            <a:r>
+              <a:rPr lang="en-US" sz="850" dirty="0" err="1">
+                <a:solidFill>
+                  <a:srgbClr val="00A896"/>
+                </a:solidFill>
+                <a:latin typeface="Consolas" pitchFamily="34" charset="0"/>
+                <a:ea typeface="Consolas" pitchFamily="34" charset="-122"/>
+                <a:cs typeface="Consolas" pitchFamily="34" charset="-120"/>
+              </a:rPr>
+              <a:t>usuario</a:t>
+            </a:r>
+            <a:r>
+              <a:rPr lang="en-US" sz="850" dirty="0">
+                <a:solidFill>
+                  <a:srgbClr val="00A896"/>
+                </a:solidFill>
+                <a:latin typeface="Consolas" pitchFamily="34" charset="0"/>
+                <a:ea typeface="Consolas" pitchFamily="34" charset="-122"/>
+                <a:cs typeface="Consolas" pitchFamily="34" charset="-120"/>
+              </a:rPr>
+              <a:t> para </a:t>
+            </a:r>
+            <a:r>
+              <a:rPr lang="en-US" sz="850" dirty="0" err="1">
+                <a:solidFill>
+                  <a:srgbClr val="00A896"/>
+                </a:solidFill>
+                <a:latin typeface="Consolas" pitchFamily="34" charset="0"/>
+                <a:ea typeface="Consolas" pitchFamily="34" charset="-122"/>
+                <a:cs typeface="Consolas" pitchFamily="34" charset="-120"/>
+              </a:rPr>
+              <a:t>almacenar</a:t>
+            </a:r>
+            <a:r>
+              <a:rPr lang="en-US" sz="850" dirty="0">
+                <a:solidFill>
+                  <a:srgbClr val="00A896"/>
+                </a:solidFill>
+                <a:latin typeface="Consolas" pitchFamily="34" charset="0"/>
+                <a:ea typeface="Consolas" pitchFamily="34" charset="-122"/>
+                <a:cs typeface="Consolas" pitchFamily="34" charset="-120"/>
+              </a:rPr>
+              <a:t> sus canciones</a:t>
+            </a:r>
+            <a:endParaRPr lang="en-US" sz="850" dirty="0"/>
+          </a:p>
+        </p:txBody>
+      </p:sp>
+      <p:sp>
+        <p:nvSpPr>
+          <p:cNvPr id="26" name="Text 8">
+            <a:extLst>
+              <a:ext uri="{FF2B5EF4-FFF2-40B4-BE49-F238E27FC236}">
+                <a16:creationId xmlns:a16="http://schemas.microsoft.com/office/drawing/2014/main" id="{5C43C850-88AA-E8ED-B043-34DBB96F7CF5}"/>
+              </a:ext>
+            </a:extLst>
+          </p:cNvPr>
+          <p:cNvSpPr/>
+          <p:nvPr/>
+        </p:nvSpPr>
+        <p:spPr>
+          <a:xfrm>
+            <a:off x="937260" y="2860005"/>
+            <a:ext cx="7909560" cy="182880"/>
+          </a:xfrm>
+          <a:prstGeom prst="rect">
+            <a:avLst/>
+          </a:prstGeom>
+          <a:noFill/>
+          <a:ln/>
+        </p:spPr>
+        <p:txBody>
+          <a:bodyPr wrap="square" lIns="0" tIns="0" rIns="0" bIns="0" rtlCol="0" anchor="ctr"/>
+          <a:lstStyle/>
+          <a:p>
+            <a:pPr marL="0" indent="0">
+              <a:buNone/>
+            </a:pPr>
+            <a:r>
+              <a:rPr lang="en-US" sz="850" dirty="0">
+                <a:solidFill>
+                  <a:srgbClr val="00A896"/>
+                </a:solidFill>
+                <a:latin typeface="Consolas" pitchFamily="34" charset="0"/>
+                <a:ea typeface="Consolas" pitchFamily="34" charset="-122"/>
+                <a:cs typeface="Consolas" pitchFamily="34" charset="-120"/>
+              </a:rPr>
+              <a:t>resources/                   ← </a:t>
+            </a:r>
+            <a:r>
+              <a:rPr lang="en-US" sz="850" dirty="0" err="1">
+                <a:solidFill>
+                  <a:srgbClr val="00A896"/>
+                </a:solidFill>
+                <a:latin typeface="Consolas" pitchFamily="34" charset="0"/>
+                <a:ea typeface="Consolas" pitchFamily="34" charset="-122"/>
+                <a:cs typeface="Consolas" pitchFamily="34" charset="-120"/>
+              </a:rPr>
+              <a:t>Recursos</a:t>
+            </a:r>
+            <a:r>
+              <a:rPr lang="en-US" sz="850" dirty="0">
+                <a:solidFill>
+                  <a:srgbClr val="00A896"/>
+                </a:solidFill>
+                <a:latin typeface="Consolas" pitchFamily="34" charset="0"/>
+                <a:ea typeface="Consolas" pitchFamily="34" charset="-122"/>
+                <a:cs typeface="Consolas" pitchFamily="34" charset="-120"/>
+              </a:rPr>
+              <a:t> </a:t>
+            </a:r>
+            <a:r>
+              <a:rPr lang="en-US" sz="850" dirty="0" err="1">
+                <a:solidFill>
+                  <a:srgbClr val="00A896"/>
+                </a:solidFill>
+                <a:latin typeface="Consolas" pitchFamily="34" charset="0"/>
+                <a:ea typeface="Consolas" pitchFamily="34" charset="-122"/>
+                <a:cs typeface="Consolas" pitchFamily="34" charset="-120"/>
+              </a:rPr>
+              <a:t>varios</a:t>
+            </a:r>
+            <a:endParaRPr lang="en-US" sz="850" dirty="0"/>
+          </a:p>
+        </p:txBody>
+      </p:sp>
+      <p:sp>
+        <p:nvSpPr>
+          <p:cNvPr id="27" name="Text 8">
+            <a:extLst>
+              <a:ext uri="{FF2B5EF4-FFF2-40B4-BE49-F238E27FC236}">
+                <a16:creationId xmlns:a16="http://schemas.microsoft.com/office/drawing/2014/main" id="{6BC7E48D-B3DB-2703-C38F-9C8DF8775CF2}"/>
+              </a:ext>
+            </a:extLst>
+          </p:cNvPr>
+          <p:cNvSpPr/>
+          <p:nvPr/>
+        </p:nvSpPr>
+        <p:spPr>
+          <a:xfrm>
+            <a:off x="937260" y="3037851"/>
+            <a:ext cx="7909560" cy="182880"/>
+          </a:xfrm>
+          <a:prstGeom prst="rect">
+            <a:avLst/>
+          </a:prstGeom>
+          <a:noFill/>
+          <a:ln/>
+        </p:spPr>
+        <p:txBody>
+          <a:bodyPr wrap="square" lIns="0" tIns="0" rIns="0" bIns="0" rtlCol="0" anchor="ctr"/>
+          <a:lstStyle/>
+          <a:p>
+            <a:pPr marL="0" indent="0">
+              <a:buNone/>
+            </a:pPr>
+            <a:r>
+              <a:rPr lang="en-US" sz="850" dirty="0">
+                <a:solidFill>
+                  <a:srgbClr val="00A896"/>
+                </a:solidFill>
+                <a:latin typeface="Consolas" pitchFamily="34" charset="0"/>
+                <a:ea typeface="Consolas" pitchFamily="34" charset="-122"/>
+                <a:cs typeface="Consolas" pitchFamily="34" charset="-120"/>
+              </a:rPr>
+              <a:t>routes/                      ← Directorio </a:t>
+            </a:r>
+            <a:r>
+              <a:rPr lang="en-US" sz="850" dirty="0" err="1">
+                <a:solidFill>
+                  <a:srgbClr val="00A896"/>
+                </a:solidFill>
+                <a:latin typeface="Consolas" pitchFamily="34" charset="0"/>
+                <a:ea typeface="Consolas" pitchFamily="34" charset="-122"/>
+                <a:cs typeface="Consolas" pitchFamily="34" charset="-120"/>
+              </a:rPr>
+              <a:t>donde</a:t>
+            </a:r>
+            <a:r>
+              <a:rPr lang="en-US" sz="850" dirty="0">
+                <a:solidFill>
+                  <a:srgbClr val="00A896"/>
+                </a:solidFill>
+                <a:latin typeface="Consolas" pitchFamily="34" charset="0"/>
+                <a:ea typeface="Consolas" pitchFamily="34" charset="-122"/>
+                <a:cs typeface="Consolas" pitchFamily="34" charset="-120"/>
+              </a:rPr>
+              <a:t> se </a:t>
+            </a:r>
+            <a:r>
+              <a:rPr lang="en-US" sz="850" dirty="0" err="1">
+                <a:solidFill>
+                  <a:srgbClr val="00A896"/>
+                </a:solidFill>
+                <a:latin typeface="Consolas" pitchFamily="34" charset="0"/>
+                <a:ea typeface="Consolas" pitchFamily="34" charset="-122"/>
+                <a:cs typeface="Consolas" pitchFamily="34" charset="-120"/>
+              </a:rPr>
+              <a:t>almacenan</a:t>
+            </a:r>
+            <a:r>
+              <a:rPr lang="en-US" sz="850" dirty="0">
+                <a:solidFill>
+                  <a:srgbClr val="00A896"/>
+                </a:solidFill>
+                <a:latin typeface="Consolas" pitchFamily="34" charset="0"/>
+                <a:ea typeface="Consolas" pitchFamily="34" charset="-122"/>
+                <a:cs typeface="Consolas" pitchFamily="34" charset="-120"/>
+              </a:rPr>
+              <a:t> las </a:t>
+            </a:r>
+            <a:r>
+              <a:rPr lang="en-US" sz="850" dirty="0" err="1">
+                <a:solidFill>
+                  <a:srgbClr val="00A896"/>
+                </a:solidFill>
+                <a:latin typeface="Consolas" pitchFamily="34" charset="0"/>
+                <a:ea typeface="Consolas" pitchFamily="34" charset="-122"/>
+                <a:cs typeface="Consolas" pitchFamily="34" charset="-120"/>
+              </a:rPr>
+              <a:t>rutas</a:t>
+            </a:r>
+            <a:r>
+              <a:rPr lang="en-US" sz="850" dirty="0">
+                <a:solidFill>
+                  <a:srgbClr val="00A896"/>
+                </a:solidFill>
+                <a:latin typeface="Consolas" pitchFamily="34" charset="0"/>
+                <a:ea typeface="Consolas" pitchFamily="34" charset="-122"/>
+                <a:cs typeface="Consolas" pitchFamily="34" charset="-120"/>
+              </a:rPr>
+              <a:t> de flask</a:t>
+            </a:r>
+            <a:endParaRPr lang="en-US" sz="850" dirty="0"/>
+          </a:p>
+        </p:txBody>
+      </p:sp>
+      <p:sp>
+        <p:nvSpPr>
+          <p:cNvPr id="28" name="Text 8">
+            <a:extLst>
+              <a:ext uri="{FF2B5EF4-FFF2-40B4-BE49-F238E27FC236}">
+                <a16:creationId xmlns:a16="http://schemas.microsoft.com/office/drawing/2014/main" id="{61E179B3-BE31-BEBC-99B2-F306C04BC835}"/>
+              </a:ext>
+            </a:extLst>
+          </p:cNvPr>
+          <p:cNvSpPr/>
+          <p:nvPr/>
+        </p:nvSpPr>
+        <p:spPr>
+          <a:xfrm>
+            <a:off x="937260" y="3221630"/>
+            <a:ext cx="7909560" cy="182880"/>
+          </a:xfrm>
+          <a:prstGeom prst="rect">
+            <a:avLst/>
+          </a:prstGeom>
+          <a:noFill/>
+          <a:ln/>
+        </p:spPr>
+        <p:txBody>
+          <a:bodyPr wrap="square" lIns="0" tIns="0" rIns="0" bIns="0" rtlCol="0" anchor="ctr"/>
+          <a:lstStyle/>
+          <a:p>
+            <a:pPr marL="0" indent="0">
+              <a:buNone/>
+            </a:pPr>
+            <a:r>
+              <a:rPr lang="en-US" sz="850" dirty="0">
+                <a:solidFill>
+                  <a:srgbClr val="00A896"/>
+                </a:solidFill>
+                <a:latin typeface="Consolas" pitchFamily="34" charset="0"/>
+                <a:ea typeface="Consolas" pitchFamily="34" charset="-122"/>
+                <a:cs typeface="Consolas" pitchFamily="34" charset="-120"/>
+              </a:rPr>
+              <a:t>services/                    ← Directorio </a:t>
+            </a:r>
+            <a:r>
+              <a:rPr lang="en-US" sz="850" dirty="0" err="1">
+                <a:solidFill>
+                  <a:srgbClr val="00A896"/>
+                </a:solidFill>
+                <a:latin typeface="Consolas" pitchFamily="34" charset="0"/>
+                <a:ea typeface="Consolas" pitchFamily="34" charset="-122"/>
+                <a:cs typeface="Consolas" pitchFamily="34" charset="-120"/>
+              </a:rPr>
+              <a:t>donde</a:t>
+            </a:r>
+            <a:r>
+              <a:rPr lang="en-US" sz="850" dirty="0">
+                <a:solidFill>
+                  <a:srgbClr val="00A896"/>
+                </a:solidFill>
+                <a:latin typeface="Consolas" pitchFamily="34" charset="0"/>
+                <a:ea typeface="Consolas" pitchFamily="34" charset="-122"/>
+                <a:cs typeface="Consolas" pitchFamily="34" charset="-120"/>
+              </a:rPr>
+              <a:t> se </a:t>
+            </a:r>
+            <a:r>
+              <a:rPr lang="en-US" sz="850" dirty="0" err="1">
+                <a:solidFill>
+                  <a:srgbClr val="00A896"/>
+                </a:solidFill>
+                <a:latin typeface="Consolas" pitchFamily="34" charset="0"/>
+                <a:ea typeface="Consolas" pitchFamily="34" charset="-122"/>
+                <a:cs typeface="Consolas" pitchFamily="34" charset="-120"/>
+              </a:rPr>
+              <a:t>almacenan</a:t>
+            </a:r>
+            <a:r>
+              <a:rPr lang="en-US" sz="850" dirty="0">
+                <a:solidFill>
+                  <a:srgbClr val="00A896"/>
+                </a:solidFill>
+                <a:latin typeface="Consolas" pitchFamily="34" charset="0"/>
+                <a:ea typeface="Consolas" pitchFamily="34" charset="-122"/>
+                <a:cs typeface="Consolas" pitchFamily="34" charset="-120"/>
+              </a:rPr>
+              <a:t> </a:t>
+            </a:r>
+            <a:r>
+              <a:rPr lang="en-US" sz="850" dirty="0" err="1">
+                <a:solidFill>
+                  <a:srgbClr val="00A896"/>
+                </a:solidFill>
+                <a:latin typeface="Consolas" pitchFamily="34" charset="0"/>
+                <a:ea typeface="Consolas" pitchFamily="34" charset="-122"/>
+                <a:cs typeface="Consolas" pitchFamily="34" charset="-120"/>
+              </a:rPr>
+              <a:t>servicios</a:t>
+            </a:r>
+            <a:r>
+              <a:rPr lang="en-US" sz="850" dirty="0">
+                <a:solidFill>
+                  <a:srgbClr val="00A896"/>
+                </a:solidFill>
+                <a:latin typeface="Consolas" pitchFamily="34" charset="0"/>
+                <a:ea typeface="Consolas" pitchFamily="34" charset="-122"/>
+                <a:cs typeface="Consolas" pitchFamily="34" charset="-120"/>
+              </a:rPr>
+              <a:t> para “</a:t>
+            </a:r>
+            <a:r>
+              <a:rPr lang="en-US" sz="850" dirty="0" err="1">
+                <a:solidFill>
+                  <a:srgbClr val="00A896"/>
+                </a:solidFill>
+                <a:latin typeface="Consolas" pitchFamily="34" charset="0"/>
+                <a:ea typeface="Consolas" pitchFamily="34" charset="-122"/>
+                <a:cs typeface="Consolas" pitchFamily="34" charset="-120"/>
+              </a:rPr>
+              <a:t>ayudar</a:t>
+            </a:r>
+            <a:r>
+              <a:rPr lang="en-US" sz="850" dirty="0">
+                <a:solidFill>
+                  <a:srgbClr val="00A896"/>
+                </a:solidFill>
+                <a:latin typeface="Consolas" pitchFamily="34" charset="0"/>
+                <a:ea typeface="Consolas" pitchFamily="34" charset="-122"/>
+                <a:cs typeface="Consolas" pitchFamily="34" charset="-120"/>
+              </a:rPr>
+              <a:t>” a </a:t>
+            </a:r>
+            <a:r>
+              <a:rPr lang="en-US" sz="850" dirty="0" err="1">
+                <a:solidFill>
+                  <a:srgbClr val="00A896"/>
+                </a:solidFill>
+                <a:latin typeface="Consolas" pitchFamily="34" charset="0"/>
+                <a:ea typeface="Consolas" pitchFamily="34" charset="-122"/>
+                <a:cs typeface="Consolas" pitchFamily="34" charset="-120"/>
+              </a:rPr>
+              <a:t>determinadas</a:t>
+            </a:r>
+            <a:r>
+              <a:rPr lang="en-US" sz="850" dirty="0">
+                <a:solidFill>
+                  <a:srgbClr val="00A896"/>
+                </a:solidFill>
+                <a:latin typeface="Consolas" pitchFamily="34" charset="0"/>
+                <a:ea typeface="Consolas" pitchFamily="34" charset="-122"/>
+                <a:cs typeface="Consolas" pitchFamily="34" charset="-120"/>
+              </a:rPr>
+              <a:t> </a:t>
+            </a:r>
+            <a:r>
+              <a:rPr lang="en-US" sz="850" dirty="0" err="1">
+                <a:solidFill>
+                  <a:srgbClr val="00A896"/>
+                </a:solidFill>
+                <a:latin typeface="Consolas" pitchFamily="34" charset="0"/>
+                <a:ea typeface="Consolas" pitchFamily="34" charset="-122"/>
+                <a:cs typeface="Consolas" pitchFamily="34" charset="-120"/>
+              </a:rPr>
+              <a:t>rutas</a:t>
+            </a:r>
+            <a:endParaRPr lang="en-US" sz="850" dirty="0"/>
+          </a:p>
+        </p:txBody>
+      </p:sp>
+      <p:sp>
+        <p:nvSpPr>
+          <p:cNvPr id="29" name="Text 8">
+            <a:extLst>
+              <a:ext uri="{FF2B5EF4-FFF2-40B4-BE49-F238E27FC236}">
+                <a16:creationId xmlns:a16="http://schemas.microsoft.com/office/drawing/2014/main" id="{72DEBFE4-1182-1367-957D-5302011710B6}"/>
+              </a:ext>
+            </a:extLst>
+          </p:cNvPr>
+          <p:cNvSpPr/>
+          <p:nvPr/>
+        </p:nvSpPr>
+        <p:spPr>
+          <a:xfrm>
+            <a:off x="937260" y="3394441"/>
+            <a:ext cx="7909560" cy="182880"/>
+          </a:xfrm>
+          <a:prstGeom prst="rect">
+            <a:avLst/>
+          </a:prstGeom>
+          <a:noFill/>
+          <a:ln/>
+        </p:spPr>
+        <p:txBody>
+          <a:bodyPr wrap="square" lIns="0" tIns="0" rIns="0" bIns="0" rtlCol="0" anchor="ctr"/>
+          <a:lstStyle/>
+          <a:p>
+            <a:pPr marL="0" indent="0">
+              <a:buNone/>
+            </a:pPr>
+            <a:r>
+              <a:rPr lang="en-US" sz="850" dirty="0">
+                <a:solidFill>
+                  <a:srgbClr val="00A896"/>
+                </a:solidFill>
+                <a:latin typeface="Consolas" pitchFamily="34" charset="0"/>
+                <a:ea typeface="Consolas" pitchFamily="34" charset="-122"/>
+                <a:cs typeface="Consolas" pitchFamily="34" charset="-120"/>
+              </a:rPr>
+              <a:t>static/                      ← </a:t>
+            </a:r>
+            <a:r>
+              <a:rPr lang="en-US" sz="850" dirty="0" err="1">
+                <a:solidFill>
+                  <a:srgbClr val="00A896"/>
+                </a:solidFill>
+                <a:latin typeface="Consolas" pitchFamily="34" charset="0"/>
+                <a:ea typeface="Consolas" pitchFamily="34" charset="-122"/>
+                <a:cs typeface="Consolas" pitchFamily="34" charset="-120"/>
+              </a:rPr>
+              <a:t>Archivos</a:t>
+            </a:r>
+            <a:r>
+              <a:rPr lang="en-US" sz="850" dirty="0">
+                <a:solidFill>
+                  <a:srgbClr val="00A896"/>
+                </a:solidFill>
+                <a:latin typeface="Consolas" pitchFamily="34" charset="0"/>
+                <a:ea typeface="Consolas" pitchFamily="34" charset="-122"/>
+                <a:cs typeface="Consolas" pitchFamily="34" charset="-120"/>
+              </a:rPr>
+              <a:t> de </a:t>
+            </a:r>
+            <a:r>
+              <a:rPr lang="en-US" sz="850" dirty="0" err="1">
+                <a:solidFill>
+                  <a:srgbClr val="00A896"/>
+                </a:solidFill>
+                <a:latin typeface="Consolas" pitchFamily="34" charset="0"/>
+                <a:ea typeface="Consolas" pitchFamily="34" charset="-122"/>
+                <a:cs typeface="Consolas" pitchFamily="34" charset="-120"/>
+              </a:rPr>
+              <a:t>estilos</a:t>
+            </a:r>
+            <a:r>
+              <a:rPr lang="en-US" sz="850" dirty="0">
+                <a:solidFill>
+                  <a:srgbClr val="00A896"/>
+                </a:solidFill>
+                <a:latin typeface="Consolas" pitchFamily="34" charset="0"/>
+                <a:ea typeface="Consolas" pitchFamily="34" charset="-122"/>
+                <a:cs typeface="Consolas" pitchFamily="34" charset="-120"/>
+              </a:rPr>
+              <a:t> para la web y </a:t>
+            </a:r>
+            <a:r>
+              <a:rPr lang="en-US" sz="850" dirty="0" err="1">
+                <a:solidFill>
+                  <a:srgbClr val="00A896"/>
+                </a:solidFill>
+                <a:latin typeface="Consolas" pitchFamily="34" charset="0"/>
+                <a:ea typeface="Consolas" pitchFamily="34" charset="-122"/>
+                <a:cs typeface="Consolas" pitchFamily="34" charset="-120"/>
+              </a:rPr>
+              <a:t>javascript</a:t>
+            </a:r>
+            <a:endParaRPr lang="en-US" sz="850" dirty="0"/>
+          </a:p>
+        </p:txBody>
+      </p:sp>
+      <p:sp>
+        <p:nvSpPr>
+          <p:cNvPr id="30" name="Text 8">
+            <a:extLst>
+              <a:ext uri="{FF2B5EF4-FFF2-40B4-BE49-F238E27FC236}">
+                <a16:creationId xmlns:a16="http://schemas.microsoft.com/office/drawing/2014/main" id="{FD5F5180-A564-FDA1-C4F7-924B9765D686}"/>
+              </a:ext>
+            </a:extLst>
+          </p:cNvPr>
+          <p:cNvSpPr/>
+          <p:nvPr/>
+        </p:nvSpPr>
+        <p:spPr>
+          <a:xfrm>
+            <a:off x="937260" y="3588230"/>
+            <a:ext cx="7909560" cy="182880"/>
+          </a:xfrm>
+          <a:prstGeom prst="rect">
+            <a:avLst/>
+          </a:prstGeom>
+          <a:noFill/>
+          <a:ln/>
+        </p:spPr>
+        <p:txBody>
+          <a:bodyPr wrap="square" lIns="0" tIns="0" rIns="0" bIns="0" rtlCol="0" anchor="ctr"/>
+          <a:lstStyle/>
+          <a:p>
+            <a:pPr marL="0" indent="0">
+              <a:buNone/>
+            </a:pPr>
+            <a:r>
+              <a:rPr lang="en-US" sz="850" dirty="0">
+                <a:solidFill>
+                  <a:srgbClr val="00A896"/>
+                </a:solidFill>
+                <a:latin typeface="Consolas" pitchFamily="34" charset="0"/>
+                <a:ea typeface="Consolas" pitchFamily="34" charset="-122"/>
+                <a:cs typeface="Consolas" pitchFamily="34" charset="-120"/>
+              </a:rPr>
+              <a:t>templates/                   ← </a:t>
+            </a:r>
+            <a:r>
+              <a:rPr lang="en-US" sz="850" dirty="0" err="1">
+                <a:solidFill>
+                  <a:srgbClr val="00A896"/>
+                </a:solidFill>
+                <a:latin typeface="Consolas" pitchFamily="34" charset="0"/>
+                <a:ea typeface="Consolas" pitchFamily="34" charset="-122"/>
+                <a:cs typeface="Consolas" pitchFamily="34" charset="-120"/>
+              </a:rPr>
+              <a:t>Archivos</a:t>
+            </a:r>
+            <a:r>
+              <a:rPr lang="en-US" sz="850" dirty="0">
+                <a:solidFill>
+                  <a:srgbClr val="00A896"/>
+                </a:solidFill>
+                <a:latin typeface="Consolas" pitchFamily="34" charset="0"/>
+                <a:ea typeface="Consolas" pitchFamily="34" charset="-122"/>
+                <a:cs typeface="Consolas" pitchFamily="34" charset="-120"/>
+              </a:rPr>
+              <a:t> HTML para la web</a:t>
+            </a:r>
+            <a:endParaRPr lang="en-US" sz="850" dirty="0"/>
+          </a:p>
+        </p:txBody>
+      </p:sp>
+      <p:sp>
+        <p:nvSpPr>
+          <p:cNvPr id="31" name="Text 8">
+            <a:extLst>
+              <a:ext uri="{FF2B5EF4-FFF2-40B4-BE49-F238E27FC236}">
+                <a16:creationId xmlns:a16="http://schemas.microsoft.com/office/drawing/2014/main" id="{49C96A42-7FF0-1141-EE35-32904890FB7B}"/>
+              </a:ext>
+            </a:extLst>
+          </p:cNvPr>
+          <p:cNvSpPr/>
+          <p:nvPr/>
+        </p:nvSpPr>
+        <p:spPr>
+          <a:xfrm>
+            <a:off x="937260" y="3782019"/>
+            <a:ext cx="7909560" cy="182880"/>
+          </a:xfrm>
+          <a:prstGeom prst="rect">
+            <a:avLst/>
+          </a:prstGeom>
+          <a:noFill/>
+          <a:ln/>
+        </p:spPr>
+        <p:txBody>
+          <a:bodyPr wrap="square" lIns="0" tIns="0" rIns="0" bIns="0" rtlCol="0" anchor="ctr"/>
+          <a:lstStyle/>
+          <a:p>
+            <a:pPr marL="0" indent="0">
+              <a:buNone/>
+            </a:pPr>
+            <a:r>
+              <a:rPr lang="en-US" sz="850" dirty="0">
+                <a:solidFill>
+                  <a:srgbClr val="00A896"/>
+                </a:solidFill>
+                <a:latin typeface="Consolas" pitchFamily="34" charset="0"/>
+                <a:ea typeface="Consolas" pitchFamily="34" charset="-122"/>
+                <a:cs typeface="Consolas" pitchFamily="34" charset="-120"/>
+              </a:rPr>
+              <a:t>tests/                       ← Directorio </a:t>
+            </a:r>
+            <a:r>
+              <a:rPr lang="en-US" sz="850" dirty="0" err="1">
+                <a:solidFill>
+                  <a:srgbClr val="00A896"/>
+                </a:solidFill>
+                <a:latin typeface="Consolas" pitchFamily="34" charset="0"/>
+                <a:ea typeface="Consolas" pitchFamily="34" charset="-122"/>
+                <a:cs typeface="Consolas" pitchFamily="34" charset="-120"/>
+              </a:rPr>
+              <a:t>donde</a:t>
+            </a:r>
+            <a:r>
+              <a:rPr lang="en-US" sz="850" dirty="0">
+                <a:solidFill>
+                  <a:srgbClr val="00A896"/>
+                </a:solidFill>
+                <a:latin typeface="Consolas" pitchFamily="34" charset="0"/>
+                <a:ea typeface="Consolas" pitchFamily="34" charset="-122"/>
+                <a:cs typeface="Consolas" pitchFamily="34" charset="-120"/>
+              </a:rPr>
+              <a:t> se </a:t>
+            </a:r>
+            <a:r>
+              <a:rPr lang="en-US" sz="850" dirty="0" err="1">
+                <a:solidFill>
+                  <a:srgbClr val="00A896"/>
+                </a:solidFill>
+                <a:latin typeface="Consolas" pitchFamily="34" charset="0"/>
+                <a:ea typeface="Consolas" pitchFamily="34" charset="-122"/>
+                <a:cs typeface="Consolas" pitchFamily="34" charset="-120"/>
+              </a:rPr>
+              <a:t>almacenan</a:t>
+            </a:r>
+            <a:r>
+              <a:rPr lang="en-US" sz="850" dirty="0">
+                <a:solidFill>
+                  <a:srgbClr val="00A896"/>
+                </a:solidFill>
+                <a:latin typeface="Consolas" pitchFamily="34" charset="0"/>
+                <a:ea typeface="Consolas" pitchFamily="34" charset="-122"/>
+                <a:cs typeface="Consolas" pitchFamily="34" charset="-120"/>
+              </a:rPr>
+              <a:t> </a:t>
+            </a:r>
+            <a:r>
+              <a:rPr lang="en-US" sz="850" dirty="0" err="1">
+                <a:solidFill>
+                  <a:srgbClr val="00A896"/>
+                </a:solidFill>
+                <a:latin typeface="Consolas" pitchFamily="34" charset="0"/>
+                <a:ea typeface="Consolas" pitchFamily="34" charset="-122"/>
+                <a:cs typeface="Consolas" pitchFamily="34" charset="-120"/>
+              </a:rPr>
+              <a:t>los</a:t>
+            </a:r>
+            <a:r>
+              <a:rPr lang="en-US" sz="850" dirty="0">
+                <a:solidFill>
+                  <a:srgbClr val="00A896"/>
+                </a:solidFill>
+                <a:latin typeface="Consolas" pitchFamily="34" charset="0"/>
+                <a:ea typeface="Consolas" pitchFamily="34" charset="-122"/>
+                <a:cs typeface="Consolas" pitchFamily="34" charset="-120"/>
+              </a:rPr>
+              <a:t> tests </a:t>
+            </a:r>
+            <a:r>
+              <a:rPr lang="en-US" sz="850" dirty="0" err="1">
+                <a:solidFill>
+                  <a:srgbClr val="00A896"/>
+                </a:solidFill>
+                <a:latin typeface="Consolas" pitchFamily="34" charset="0"/>
+                <a:ea typeface="Consolas" pitchFamily="34" charset="-122"/>
+                <a:cs typeface="Consolas" pitchFamily="34" charset="-120"/>
+              </a:rPr>
+              <a:t>realizados</a:t>
+            </a:r>
+            <a:endParaRPr lang="en-US" sz="850" dirty="0"/>
+          </a:p>
+        </p:txBody>
+      </p:sp>
+      <p:sp>
+        <p:nvSpPr>
+          <p:cNvPr id="32" name="Text 8">
+            <a:extLst>
+              <a:ext uri="{FF2B5EF4-FFF2-40B4-BE49-F238E27FC236}">
+                <a16:creationId xmlns:a16="http://schemas.microsoft.com/office/drawing/2014/main" id="{BCE62122-B77B-D322-5E1A-DBF0490833C3}"/>
+              </a:ext>
+            </a:extLst>
+          </p:cNvPr>
+          <p:cNvSpPr/>
+          <p:nvPr/>
+        </p:nvSpPr>
+        <p:spPr>
+          <a:xfrm>
+            <a:off x="937260" y="3952713"/>
+            <a:ext cx="7909560" cy="182880"/>
+          </a:xfrm>
+          <a:prstGeom prst="rect">
+            <a:avLst/>
+          </a:prstGeom>
+          <a:noFill/>
+          <a:ln/>
+        </p:spPr>
+        <p:txBody>
+          <a:bodyPr wrap="square" lIns="0" tIns="0" rIns="0" bIns="0" rtlCol="0" anchor="ctr"/>
+          <a:lstStyle/>
+          <a:p>
+            <a:pPr marL="0" indent="0">
+              <a:buNone/>
+            </a:pPr>
+            <a:r>
+              <a:rPr lang="en-US" sz="850" dirty="0">
+                <a:solidFill>
+                  <a:srgbClr val="00A896"/>
+                </a:solidFill>
+                <a:latin typeface="Consolas" pitchFamily="34" charset="0"/>
+                <a:ea typeface="Consolas" pitchFamily="34" charset="-122"/>
+                <a:cs typeface="Consolas" pitchFamily="34" charset="-120"/>
+              </a:rPr>
+              <a:t>others                       ← .env, config.py y main.py</a:t>
             </a:r>
             <a:endParaRPr lang="en-US" sz="850" dirty="0"/>
           </a:p>
@@ -18826,7 +19623,18 @@
                 <a:ea typeface="Calibri" pitchFamily="34" charset="-122"/>
                 <a:cs typeface="Calibri" pitchFamily="34" charset="-120"/>
               </a:rPr>
-              <a:t>Letras sincronizadas</a:t>
+              <a:t>Letras </a:t>
+            </a:r>
+            <a:r>
+              <a:rPr lang="en-US" sz="1050" b="1" dirty="0" err="1">
+                <a:solidFill>
+                  <a:srgbClr val="00A896"/>
+                </a:solidFill>
+                <a:latin typeface="Calibri" pitchFamily="34" charset="0"/>
+                <a:ea typeface="Calibri" pitchFamily="34" charset="-122"/>
+                <a:cs typeface="Calibri" pitchFamily="34" charset="-120"/>
+              </a:rPr>
+              <a:t>sincronizadas</a:t>
             </a:r>
             <a:endParaRPr lang="en-US" sz="1050" dirty="0"/>
           </a:p>
@@ -23131,7 +23939,29 @@
                 <a:ea typeface="Calibri" pitchFamily="34" charset="-122"/>
                 <a:cs typeface="Calibri" pitchFamily="34" charset="-120"/>
               </a:rPr>
-              <a:t>Descargar y reproducir canciones directamente desde YouTube.</a:t>
+              <a:t>Descargar y </a:t>
+            </a:r>
+            <a:r>
+              <a:rPr lang="en-US" sz="950" dirty="0" err="1">
+                <a:solidFill>
+                  <a:srgbClr val="8B949E"/>
+                </a:solidFill>
+                <a:latin typeface="Calibri" pitchFamily="34" charset="0"/>
+                <a:ea typeface="Calibri" pitchFamily="34" charset="-122"/>
+                <a:cs typeface="Calibri" pitchFamily="34" charset="-120"/>
+              </a:rPr>
+              <a:t>reproducir</a:t>
+            </a:r>
+            <a:r>
+              <a:rPr lang="en-US" sz="950" dirty="0">
+                <a:solidFill>
+                  <a:srgbClr val="8B949E"/>
+                </a:solidFill>
+                <a:latin typeface="Calibri" pitchFamily="34" charset="0"/>
+                <a:ea typeface="Calibri" pitchFamily="34" charset="-122"/>
+                <a:cs typeface="Calibri" pitchFamily="34" charset="-120"/>
+              </a:rPr>
+              <a:t> canciones directamente desde YouTube.</a:t>
             </a:r>
             <a:endParaRPr lang="en-US" sz="950" dirty="0"/>
           </a:p>
@@ -23970,7 +24800,7 @@
         </p:nvSpPr>
         <p:spPr>
           <a:xfrm>
-            <a:off x="2286000" y="2286000"/>
+            <a:off x="2285999" y="2194560"/>
             <a:ext cx="640080" cy="0"/>
           </a:xfrm>
           <a:prstGeom prst="line">
@@ -25363,6 +26193,20 @@
           <a:bodyPr wrap="square" lIns="0" tIns="0" rIns="0" bIns="0" rtlCol="0" anchor="ctr"/>
           <a:lstStyle/>
           <a:p>
+            <a:r>
+              <a:rPr lang="en-US" sz="900" dirty="0">
+                <a:solidFill>
+                  <a:srgbClr val="3B82F6"/>
+                </a:solidFill>
+                <a:latin typeface="Calibri" pitchFamily="34" charset="0"/>
+                <a:ea typeface="Calibri" pitchFamily="34" charset="-122"/>
+                <a:cs typeface="Calibri" pitchFamily="34" charset="-120"/>
+              </a:rPr>
+              <a:t>GET</a:t>
+            </a:r>
+            <a:endParaRPr lang="en-US" sz="900" dirty="0"/>
+          </a:p>
+          <a:p>
             <a:pPr marL="0" indent="0">
               <a:buNone/>
             </a:pPr>
@@ -25414,7 +26258,7 @@
                 <a:ea typeface="Consolas" pitchFamily="34" charset="-122"/>
                 <a:cs typeface="Consolas" pitchFamily="34" charset="-120"/>
               </a:rPr>
-              <a:t>/login / /register</a:t>
+              <a:t>/login /register</a:t>
             </a:r>
             <a:endParaRPr lang="en-US" sz="900" dirty="0"/>
           </a:p>
@@ -25482,7 +26326,7 @@
           <a:bodyPr/>
           <a:lstStyle/>
           <a:p>
-            <a:endParaRPr lang="es-ES"/>
+            <a:endParaRPr lang="es-ES" dirty="0"/>
           </a:p>
         </p:txBody>
       </p:sp>
@@ -25558,7 +26402,29 @@
                 <a:ea typeface="Consolas" pitchFamily="34" charset="-122"/>
                 <a:cs typeface="Consolas" pitchFamily="34" charset="-120"/>
               </a:rPr>
-              <a:t>/songs</a:t>
+              <a:t>/play/&lt;</a:t>
+            </a:r>
+            <a:r>
+              <a:rPr lang="en-US" sz="900" dirty="0" err="1">
+                <a:solidFill>
+                  <a:srgbClr val="00A896"/>
+                </a:solidFill>
+                <a:latin typeface="Consolas" pitchFamily="34" charset="0"/>
+                <a:ea typeface="Consolas" pitchFamily="34" charset="-122"/>
+                <a:cs typeface="Consolas" pitchFamily="34" charset="-120"/>
+              </a:rPr>
+              <a:t>path:filename</a:t>
+            </a:r>
+            <a:r>
+              <a:rPr lang="en-US" sz="900" dirty="0">
+                <a:solidFill>
+                  <a:srgbClr val="00A896"/>
+                </a:solidFill>
+                <a:latin typeface="Consolas" pitchFamily="34" charset="0"/>
+                <a:ea typeface="Consolas" pitchFamily="34" charset="-122"/>
+                <a:cs typeface="Consolas" pitchFamily="34" charset="-120"/>
+              </a:rPr>
+              <a:t>&gt;</a:t>
             </a:r>
             <a:endParaRPr lang="en-US" sz="900" dirty="0"/>
           </a:p>
@@ -25597,7 +26463,7 @@
                 <a:ea typeface="Calibri" pitchFamily="34" charset="-122"/>
                 <a:cs typeface="Calibri" pitchFamily="34" charset="-120"/>
               </a:rPr>
-              <a:t>Listado de canciones del usuario</a:t>
+              <a:t>Reproducir canciones</a:t>
             </a:r>
             <a:endParaRPr lang="en-US" sz="900" dirty="0"/>
           </a:p>
@@ -25846,7 +26712,18 @@
                 <a:ea typeface="Consolas" pitchFamily="34" charset="-122"/>
                 <a:cs typeface="Consolas" pitchFamily="34" charset="-120"/>
               </a:rPr>
-              <a:t>/download</a:t>
+              <a:t>/</a:t>
+            </a:r>
+            <a:r>
+              <a:rPr lang="en-US" sz="900" dirty="0" err="1">
+                <a:solidFill>
+                  <a:srgbClr val="00A896"/>
+                </a:solidFill>
+                <a:latin typeface="Consolas" pitchFamily="34" charset="0"/>
+                <a:ea typeface="Consolas" pitchFamily="34" charset="-122"/>
+                <a:cs typeface="Consolas" pitchFamily="34" charset="-120"/>
+              </a:rPr>
+              <a:t>youtube_download</a:t>
             </a:r>
             <a:endParaRPr lang="en-US" sz="900" dirty="0"/>
           </a:p>
@@ -25939,19 +26816,16 @@
           <a:bodyPr wrap="square" lIns="0" tIns="0" rIns="0" bIns="0" rtlCol="0" anchor="ctr"/>
           <a:lstStyle/>
           <a:p>
-            <a:pPr marL="0" indent="0">
-              <a:buNone/>
-            </a:pPr>
             <a:r>
               <a:rPr lang="en-US" sz="900" dirty="0">
                 <a:solidFill>
-                  <a:srgbClr val="3B82F6"/>
-                </a:solidFill>
-                <a:latin typeface="Calibri" pitchFamily="34" charset="0"/>
-                <a:ea typeface="Calibri" pitchFamily="34" charset="-122"/>
-                <a:cs typeface="Calibri" pitchFamily="34" charset="-120"/>
-              </a:rPr>
-              <a:t>GET</a:t>
+                  <a:srgbClr val="22C55E"/>
+                </a:solidFill>
+                <a:latin typeface="Calibri" pitchFamily="34" charset="0"/>
+                <a:ea typeface="Calibri" pitchFamily="34" charset="-122"/>
+                <a:cs typeface="Calibri" pitchFamily="34" charset="-120"/>
+              </a:rPr>
+              <a:t>POST</a:t>
             </a:r>
             <a:endParaRPr lang="en-US" sz="900" dirty="0"/>
           </a:p>
@@ -25978,9 +26852,6 @@
           <a:bodyPr wrap="square" lIns="0" tIns="0" rIns="0" bIns="0" rtlCol="0" anchor="ctr"/>
           <a:lstStyle/>
           <a:p>
-            <a:pPr marL="0" indent="0">
-              <a:buNone/>
-            </a:pPr>
             <a:r>
               <a:rPr lang="en-US" sz="900" dirty="0">
                 <a:solidFill>
@@ -25990,7 +26861,18 @@
                 <a:ea typeface="Consolas" pitchFamily="34" charset="-122"/>
                 <a:cs typeface="Consolas" pitchFamily="34" charset="-120"/>
               </a:rPr>
-              <a:t>/stream/&lt;id&gt;</a:t>
+              <a:t>/</a:t>
+            </a:r>
+            <a:r>
+              <a:rPr lang="en-US" sz="900" dirty="0" err="1">
+                <a:solidFill>
+                  <a:srgbClr val="00A896"/>
+                </a:solidFill>
+                <a:latin typeface="Consolas" pitchFamily="34" charset="0"/>
+                <a:ea typeface="Consolas" pitchFamily="34" charset="-122"/>
+                <a:cs typeface="Consolas" pitchFamily="34" charset="-120"/>
+              </a:rPr>
+              <a:t>delete_songs</a:t>
             </a:r>
             <a:endParaRPr lang="en-US" sz="900" dirty="0"/>
           </a:p>
@@ -26017,9 +26899,17 @@
           <a:bodyPr wrap="square" lIns="0" tIns="0" rIns="0" bIns="0" rtlCol="0" anchor="ctr"/>
           <a:lstStyle/>
           <a:p>
-            <a:pPr marL="0" indent="0">
-              <a:buNone/>
-            </a:pPr>
+            <a:r>
+              <a:rPr lang="en-US" sz="900" dirty="0" err="1">
+                <a:solidFill>
+                  <a:srgbClr val="E6EDF3"/>
+                </a:solidFill>
+                <a:latin typeface="Calibri" pitchFamily="34" charset="0"/>
+                <a:ea typeface="Calibri" pitchFamily="34" charset="-122"/>
+                <a:cs typeface="Calibri" pitchFamily="34" charset="-120"/>
+              </a:rPr>
+              <a:t>Eliminación</a:t>
+            </a:r>
             <a:r>
               <a:rPr lang="en-US" sz="900" dirty="0">
                 <a:solidFill>
@@ -26029,7 +26919,7 @@
                 <a:ea typeface="Calibri" pitchFamily="34" charset="-122"/>
                 <a:cs typeface="Calibri" pitchFamily="34" charset="-120"/>
               </a:rPr>
-              <a:t>Streaming de audio al cliente</a:t>
+              <a:t> de una canción</a:t>
             </a:r>
             <a:endParaRPr lang="en-US" sz="900" dirty="0"/>
           </a:p>
@@ -26227,19 +27117,16 @@
           <a:bodyPr wrap="square" lIns="0" tIns="0" rIns="0" bIns="0" rtlCol="0" anchor="ctr"/>
           <a:lstStyle/>
           <a:p>
-            <a:pPr marL="0" indent="0">
-              <a:buNone/>
-            </a:pPr>
             <a:r>
               <a:rPr lang="en-US" sz="900" dirty="0">
                 <a:solidFill>
-                  <a:srgbClr val="EF4444"/>
-                </a:solidFill>
-                <a:latin typeface="Calibri" pitchFamily="34" charset="0"/>
-                <a:ea typeface="Calibri" pitchFamily="34" charset="-122"/>
-                <a:cs typeface="Calibri" pitchFamily="34" charset="-120"/>
-              </a:rPr>
-              <a:t>DELETE</a:t>
+                  <a:srgbClr val="22C55E"/>
+                </a:solidFill>
+                <a:latin typeface="Calibri" pitchFamily="34" charset="0"/>
+                <a:ea typeface="Calibri" pitchFamily="34" charset="-122"/>
+                <a:cs typeface="Calibri" pitchFamily="34" charset="-120"/>
+              </a:rPr>
+              <a:t>POST</a:t>
             </a:r>
             <a:endParaRPr lang="en-US" sz="900" dirty="0"/>
           </a:p>
@@ -26278,7 +27165,18 @@
                 <a:ea typeface="Consolas" pitchFamily="34" charset="-122"/>
                 <a:cs typeface="Consolas" pitchFamily="34" charset="-120"/>
               </a:rPr>
-              <a:t>/songs/&lt;id&gt;</a:t>
+              <a:t>/</a:t>
+            </a:r>
+            <a:r>
+              <a:rPr lang="en-US" sz="900" dirty="0" err="1">
+                <a:solidFill>
+                  <a:srgbClr val="00A896"/>
+                </a:solidFill>
+                <a:latin typeface="Consolas" pitchFamily="34" charset="0"/>
+                <a:ea typeface="Consolas" pitchFamily="34" charset="-122"/>
+                <a:cs typeface="Consolas" pitchFamily="34" charset="-120"/>
+              </a:rPr>
+              <a:t>import_youtube_playlists</a:t>
             </a:r>
             <a:endParaRPr lang="en-US" sz="900" dirty="0"/>
           </a:p>
@@ -26309,6 +27207,17 @@
               <a:buNone/>
             </a:pPr>
             <a:r>
+              <a:rPr lang="en-US" sz="900" dirty="0" err="1">
+                <a:solidFill>
+                  <a:srgbClr val="E6EDF3"/>
+                </a:solidFill>
+                <a:latin typeface="Calibri" pitchFamily="34" charset="0"/>
+                <a:ea typeface="Calibri" pitchFamily="34" charset="-122"/>
+                <a:cs typeface="Calibri" pitchFamily="34" charset="-120"/>
+              </a:rPr>
+              <a:t>Importación</a:t>
+            </a:r>
+            <a:r>
               <a:rPr lang="en-US" sz="900" dirty="0">
                 <a:solidFill>
                   <a:srgbClr val="E6EDF3"/>
@@ -26317,7 +27226,18 @@
                 <a:ea typeface="Calibri" pitchFamily="34" charset="-122"/>
                 <a:cs typeface="Calibri" pitchFamily="34" charset="-120"/>
               </a:rPr>
-              <a:t>Eliminación de una canción</a:t>
+              <a:t> de playlists de la plataforma de </a:t>
+            </a:r>
+            <a:r>
+              <a:rPr lang="en-US" sz="900" dirty="0" err="1">
+                <a:solidFill>
+                  <a:srgbClr val="E6EDF3"/>
+                </a:solidFill>
+                <a:latin typeface="Calibri" pitchFamily="34" charset="0"/>
+                <a:ea typeface="Calibri" pitchFamily="34" charset="-122"/>
+                <a:cs typeface="Calibri" pitchFamily="34" charset="-120"/>
+              </a:rPr>
+              <a:t>youtube</a:t>
             </a:r>
             <a:endParaRPr lang="en-US" sz="900" dirty="0"/>
           </a:p>
@@ -26346,7 +27266,7 @@
           <a:bodyPr/>
           <a:lstStyle/>
           <a:p>
-            <a:endParaRPr lang="es-ES"/>
+            <a:endParaRPr lang="es-ES" dirty="0"/>
           </a:p>
         </p:txBody>
       </p:sp>
@@ -26371,19 +27291,16 @@
           <a:bodyPr wrap="square" lIns="0" tIns="0" rIns="0" bIns="0" rtlCol="0" anchor="ctr"/>
           <a:lstStyle/>
           <a:p>
-            <a:pPr marL="0" indent="0">
-              <a:buNone/>
-            </a:pPr>
             <a:r>
               <a:rPr lang="en-US" sz="900" dirty="0">
                 <a:solidFill>
-                  <a:srgbClr val="3B82F6"/>
-                </a:solidFill>
-                <a:latin typeface="Calibri" pitchFamily="34" charset="0"/>
-                <a:ea typeface="Calibri" pitchFamily="34" charset="-122"/>
-                <a:cs typeface="Calibri" pitchFamily="34" charset="-120"/>
-              </a:rPr>
-              <a:t>GET</a:t>
+                  <a:srgbClr val="22C55E"/>
+                </a:solidFill>
+                <a:latin typeface="Calibri" pitchFamily="34" charset="0"/>
+                <a:ea typeface="Calibri" pitchFamily="34" charset="-122"/>
+                <a:cs typeface="Calibri" pitchFamily="34" charset="-120"/>
+              </a:rPr>
+              <a:t>POST</a:t>
             </a:r>
             <a:endParaRPr lang="en-US" sz="900" dirty="0"/>
           </a:p>
@@ -26422,7 +27339,18 @@
                 <a:ea typeface="Consolas" pitchFamily="34" charset="-122"/>
                 <a:cs typeface="Consolas" pitchFamily="34" charset="-120"/>
               </a:rPr>
-              <a:t>/search</a:t>
+              <a:t>/</a:t>
+            </a:r>
+            <a:r>
+              <a:rPr lang="en-US" sz="900" dirty="0" err="1">
+                <a:solidFill>
+                  <a:srgbClr val="00A896"/>
+                </a:solidFill>
+                <a:latin typeface="Consolas" pitchFamily="34" charset="0"/>
+                <a:ea typeface="Consolas" pitchFamily="34" charset="-122"/>
+                <a:cs typeface="Consolas" pitchFamily="34" charset="-120"/>
+              </a:rPr>
+              <a:t>sync_youtube_playlist</a:t>
             </a:r>
             <a:endParaRPr lang="en-US" sz="900" dirty="0"/>
           </a:p>
@@ -26461,7 +27389,18 @@
                 <a:ea typeface="Calibri" pitchFamily="34" charset="-122"/>
                 <a:cs typeface="Calibri" pitchFamily="34" charset="-120"/>
               </a:rPr>
-              <a:t>Búsqueda de canciones en la biblioteca</a:t>
+              <a:t>Sincronización de una playlist importada de la plataforma de </a:t>
+            </a:r>
+            <a:r>
+              <a:rPr lang="en-US" sz="900" dirty="0" err="1">
+                <a:solidFill>
+                  <a:srgbClr val="E6EDF3"/>
+                </a:solidFill>
+                <a:latin typeface="Calibri" pitchFamily="34" charset="0"/>
+                <a:ea typeface="Calibri" pitchFamily="34" charset="-122"/>
+                <a:cs typeface="Calibri" pitchFamily="34" charset="-120"/>
+              </a:rPr>
+              <a:t>Youtube</a:t>
             </a:r>
             <a:endParaRPr lang="en-US" sz="900" dirty="0"/>
           </a:p>
@@ -26541,22 +27480,19 @@
         </p:nvSpPr>
         <p:spPr>
           <a:xfrm>
-            <a:off x="1669796" y="4750054"/>
-            <a:ext cx="6942328" cy="292608"/>
-          </a:xfrm>
-          <a:prstGeom prst="rect">
-            <a:avLst/>
-          </a:prstGeom>
-          <a:noFill/>
-          <a:ln/>
-        </p:spPr>
-        <p:txBody>
-          <a:bodyPr wrap="square" lIns="0" tIns="0" rIns="0" bIns="0" rtlCol="0" anchor="ctr"/>
-          <a:lstStyle/>
-          <a:p>
-            <a:pPr marL="0" indent="0">
-              <a:buNone/>
-            </a:pPr>
+            <a:off x="1727454" y="4750054"/>
+            <a:ext cx="7108444" cy="292608"/>
+          </a:xfrm>
+          <a:prstGeom prst="rect">
+            <a:avLst/>
+          </a:prstGeom>
+          <a:noFill/>
+          <a:ln/>
+        </p:spPr>
+        <p:txBody>
+          <a:bodyPr wrap="square" lIns="0" tIns="0" rIns="0" bIns="0" rtlCol="0" anchor="ctr"/>
+          <a:lstStyle/>
+          <a:p>
             <a:r>
               <a:rPr lang="en-US" sz="950" dirty="0">
                 <a:solidFill>
@@ -26566,7 +27502,7 @@
                 <a:ea typeface="Consolas" pitchFamily="34" charset="-122"/>
                 <a:cs typeface="Consolas" pitchFamily="34" charset="-120"/>
               </a:rPr>
-              <a:t>app.py  ·  auth.py  ·  songs.py  ·  playlists.py  ·  downloader.py  ·  database.py  ·  streamer.py</a:t>
+              <a:t>main.py  ·  auth.py  ·  music.py  ·  playlists.py  ·  upload.py  ·  database.py  ·  admin.py ·  youtube.py</a:t>
             </a:r>
             <a:endParaRPr lang="en-US" sz="950" dirty="0"/>
           </a:p>
@@ -26743,7 +27679,7 @@
           <a:bodyPr/>
           <a:lstStyle/>
           <a:p>
-            <a:endParaRPr lang="es-ES"/>
+            <a:endParaRPr lang="es-ES" dirty="0"/>
           </a:p>
         </p:txBody>
       </p:sp>
@@ -26845,7 +27781,7 @@
         </p:nvSpPr>
         <p:spPr>
           <a:xfrm>
-            <a:off x="457200" y="1798574"/>
+            <a:off x="457200" y="1721322"/>
             <a:ext cx="3840480" cy="228600"/>
           </a:xfrm>
           <a:prstGeom prst="rect">
@@ -26870,7 +27806,7 @@
                 <a:ea typeface="Consolas" pitchFamily="34" charset="-122"/>
                 <a:cs typeface="Consolas" pitchFamily="34" charset="-120"/>
               </a:rPr>
-              <a:t>id  INT PK AI</a:t>
+              <a:t>id  INT PK </a:t>
             </a:r>
             <a:endParaRPr lang="en-US" sz="850" dirty="0"/>
           </a:p>
@@ -26884,7 +27820,7 @@
         </p:nvSpPr>
         <p:spPr>
           <a:xfrm>
-            <a:off x="457200" y="2045462"/>
+            <a:off x="457200" y="1947147"/>
             <a:ext cx="3840480" cy="228600"/>
           </a:xfrm>
           <a:prstGeom prst="rect">
@@ -26909,7 +27845,7 @@
                 <a:ea typeface="Consolas" pitchFamily="34" charset="-122"/>
                 <a:cs typeface="Consolas" pitchFamily="34" charset="-120"/>
               </a:rPr>
-              <a:t>username  VARCHAR(100)</a:t>
+              <a:t>username  VARCHAR(255)</a:t>
             </a:r>
             <a:endParaRPr lang="en-US" sz="850" dirty="0"/>
           </a:p>
@@ -26923,7 +27859,7 @@
         </p:nvSpPr>
         <p:spPr>
           <a:xfrm>
-            <a:off x="457200" y="2292350"/>
+            <a:off x="457200" y="2180877"/>
             <a:ext cx="3840480" cy="228600"/>
           </a:xfrm>
           <a:prstGeom prst="rect">
@@ -26936,9 +27872,6 @@
           <a:bodyPr wrap="square" lIns="0" tIns="0" rIns="0" bIns="0" rtlCol="0" anchor="ctr"/>
           <a:lstStyle/>
           <a:p>
-            <a:pPr marL="0" indent="0">
-              <a:buNone/>
-            </a:pPr>
             <a:r>
               <a:rPr lang="en-US" sz="850" dirty="0">
                 <a:solidFill>
@@ -26948,7 +27881,7 @@
                 <a:ea typeface="Consolas" pitchFamily="34" charset="-122"/>
                 <a:cs typeface="Consolas" pitchFamily="34" charset="-120"/>
               </a:rPr>
-              <a:t>email  VARCHAR(150) UNIQUE</a:t>
+              <a:t>password VARCHAR(255)</a:t>
             </a:r>
             <a:endParaRPr lang="en-US" sz="850" dirty="0"/>
           </a:p>
@@ -26978,8 +27911,36 @@
             <a:pPr marL="0" indent="0">
               <a:buNone/>
             </a:pPr>
-            <a:r>
-              <a:rPr lang="en-US" sz="850" dirty="0">
+            <a:endParaRPr lang="en-US" sz="850" dirty="0"/>
+          </a:p>
+        </p:txBody>
+      </p:sp>
+      <p:sp>
+        <p:nvSpPr>
+          <p:cNvPr id="13" name="Text 10"/>
+          <p:cNvSpPr/>
+          <p:nvPr/>
+        </p:nvSpPr>
+        <p:spPr>
+          <a:xfrm>
+            <a:off x="457200" y="2563876"/>
+            <a:ext cx="3840480" cy="228600"/>
+          </a:xfrm>
+          <a:prstGeom prst="rect">
+            <a:avLst/>
+          </a:prstGeom>
+          <a:noFill/>
+          <a:ln/>
+        </p:spPr>
+        <p:txBody>
+          <a:bodyPr wrap="square" lIns="0" tIns="0" rIns="0" bIns="0" rtlCol="0" anchor="ctr"/>
+          <a:lstStyle/>
+          <a:p>
+            <a:pPr marL="0" indent="0">
+              <a:buNone/>
+            </a:pPr>
+            <a:r>
+              <a:rPr lang="en-US" sz="850" dirty="0" err="1">
                 <a:solidFill>
                   <a:srgbClr val="8B949E"/>
                 </a:solidFill>
@@ -26987,36 +27948,8 @@
                 <a:ea typeface="Consolas" pitchFamily="34" charset="-122"/>
                 <a:cs typeface="Consolas" pitchFamily="34" charset="-120"/>
               </a:rPr>
-              <a:t>password_hash  VARCHAR(256)</a:t>
-            </a:r>
-            <a:endParaRPr lang="en-US" sz="850" dirty="0"/>
-          </a:p>
-        </p:txBody>
-      </p:sp>
-      <p:sp>
-        <p:nvSpPr>
-          <p:cNvPr id="13" name="Text 10"/>
-          <p:cNvSpPr/>
-          <p:nvPr/>
-        </p:nvSpPr>
-        <p:spPr>
-          <a:xfrm>
-            <a:off x="457200" y="2786126"/>
-            <a:ext cx="3840480" cy="228600"/>
-          </a:xfrm>
-          <a:prstGeom prst="rect">
-            <a:avLst/>
-          </a:prstGeom>
-          <a:noFill/>
-          <a:ln/>
-        </p:spPr>
-        <p:txBody>
-          <a:bodyPr wrap="square" lIns="0" tIns="0" rIns="0" bIns="0" rtlCol="0" anchor="ctr"/>
-          <a:lstStyle/>
-          <a:p>
-            <a:pPr marL="0" indent="0">
-              <a:buNone/>
-            </a:pPr>
+              <a:t>total_songs</a:t>
+            </a:r>
             <a:r>
               <a:rPr lang="en-US" sz="850" dirty="0">
                 <a:solidFill>
@@ -27026,7 +27959,7 @@
                 <a:ea typeface="Consolas" pitchFamily="34" charset="-122"/>
                 <a:cs typeface="Consolas" pitchFamily="34" charset="-120"/>
               </a:rPr>
-              <a:t>created_at  DATETIME</a:t>
+              <a:t> INT</a:t>
             </a:r>
             <a:endParaRPr lang="en-US" sz="850" dirty="0"/>
           </a:p>
@@ -27158,240 +28091,6 @@
       </p:sp>
       <p:sp>
         <p:nvSpPr>
-          <p:cNvPr id="18" name="Text 14"/>
-          <p:cNvSpPr/>
-          <p:nvPr/>
-        </p:nvSpPr>
-        <p:spPr>
-          <a:xfrm>
-            <a:off x="4800600" y="1798574"/>
-            <a:ext cx="3840480" cy="228600"/>
-          </a:xfrm>
-          <a:prstGeom prst="rect">
-            <a:avLst/>
-          </a:prstGeom>
-          <a:noFill/>
-          <a:ln/>
-        </p:spPr>
-        <p:txBody>
-          <a:bodyPr wrap="square" lIns="0" tIns="0" rIns="0" bIns="0" rtlCol="0" anchor="ctr"/>
-          <a:lstStyle/>
-          <a:p>
-            <a:pPr marL="0" indent="0">
-              <a:buNone/>
-            </a:pPr>
-            <a:r>
-              <a:rPr lang="en-US" sz="850" dirty="0">
-                <a:solidFill>
-                  <a:srgbClr val="8B949E"/>
-                </a:solidFill>
-                <a:latin typeface="Consolas" pitchFamily="34" charset="0"/>
-                <a:ea typeface="Consolas" pitchFamily="34" charset="-122"/>
-                <a:cs typeface="Consolas" pitchFamily="34" charset="-120"/>
-              </a:rPr>
-              <a:t>id  INT PK AI</a:t>
-            </a:r>
-            <a:endParaRPr lang="en-US" sz="850" dirty="0"/>
-          </a:p>
-        </p:txBody>
-      </p:sp>
-      <p:sp>
-        <p:nvSpPr>
-          <p:cNvPr id="19" name="Text 15"/>
-          <p:cNvSpPr/>
-          <p:nvPr/>
-        </p:nvSpPr>
-        <p:spPr>
-          <a:xfrm>
-            <a:off x="4800600" y="2045462"/>
-            <a:ext cx="3840480" cy="228600"/>
-          </a:xfrm>
-          <a:prstGeom prst="rect">
-            <a:avLst/>
-          </a:prstGeom>
-          <a:noFill/>
-          <a:ln/>
-        </p:spPr>
-        <p:txBody>
-          <a:bodyPr wrap="square" lIns="0" tIns="0" rIns="0" bIns="0" rtlCol="0" anchor="ctr"/>
-          <a:lstStyle/>
-          <a:p>
-            <a:pPr marL="0" indent="0">
-              <a:buNone/>
-            </a:pPr>
-            <a:r>
-              <a:rPr lang="en-US" sz="850" dirty="0">
-                <a:solidFill>
-                  <a:srgbClr val="8B949E"/>
-                </a:solidFill>
-                <a:latin typeface="Consolas" pitchFamily="34" charset="0"/>
-                <a:ea typeface="Consolas" pitchFamily="34" charset="-122"/>
-                <a:cs typeface="Consolas" pitchFamily="34" charset="-120"/>
-              </a:rPr>
-              <a:t>user_id  FK → users</a:t>
-            </a:r>
-            <a:endParaRPr lang="en-US" sz="850" dirty="0"/>
-          </a:p>
-        </p:txBody>
-      </p:sp>
-      <p:sp>
-        <p:nvSpPr>
-          <p:cNvPr id="20" name="Text 16"/>
-          <p:cNvSpPr/>
-          <p:nvPr/>
-        </p:nvSpPr>
-        <p:spPr>
-          <a:xfrm>
-            <a:off x="4800600" y="2292350"/>
-            <a:ext cx="3840480" cy="228600"/>
-          </a:xfrm>
-          <a:prstGeom prst="rect">
-            <a:avLst/>
-          </a:prstGeom>
-          <a:noFill/>
-          <a:ln/>
-        </p:spPr>
-        <p:txBody>
-          <a:bodyPr wrap="square" lIns="0" tIns="0" rIns="0" bIns="0" rtlCol="0" anchor="ctr"/>
-          <a:lstStyle/>
-          <a:p>
-            <a:pPr marL="0" indent="0">
-              <a:buNone/>
-            </a:pPr>
-            <a:r>
-              <a:rPr lang="en-US" sz="850" dirty="0">
-                <a:solidFill>
-                  <a:srgbClr val="8B949E"/>
-                </a:solidFill>
-                <a:latin typeface="Consolas" pitchFamily="34" charset="0"/>
-                <a:ea typeface="Consolas" pitchFamily="34" charset="-122"/>
-                <a:cs typeface="Consolas" pitchFamily="34" charset="-120"/>
-              </a:rPr>
-              <a:t>title  VARCHAR(200)</a:t>
-            </a:r>
-            <a:endParaRPr lang="en-US" sz="850" dirty="0"/>
-          </a:p>
-        </p:txBody>
-      </p:sp>
-      <p:sp>
-        <p:nvSpPr>
-          <p:cNvPr id="21" name="Text 17"/>
-          <p:cNvSpPr/>
-          <p:nvPr/>
-        </p:nvSpPr>
-        <p:spPr>
-          <a:xfrm>
-            <a:off x="4800600" y="2539238"/>
-            <a:ext cx="3840480" cy="228600"/>
-          </a:xfrm>
-          <a:prstGeom prst="rect">
-            <a:avLst/>
-          </a:prstGeom>
-          <a:noFill/>
-          <a:ln/>
-        </p:spPr>
-        <p:txBody>
-          <a:bodyPr wrap="square" lIns="0" tIns="0" rIns="0" bIns="0" rtlCol="0" anchor="ctr"/>
-          <a:lstStyle/>
-          <a:p>
-            <a:pPr marL="0" indent="0">
-              <a:buNone/>
-            </a:pPr>
-            <a:r>
-              <a:rPr lang="en-US" sz="850" dirty="0">
-                <a:solidFill>
-                  <a:srgbClr val="8B949E"/>
-                </a:solidFill>
-                <a:latin typeface="Consolas" pitchFamily="34" charset="0"/>
-                <a:ea typeface="Consolas" pitchFamily="34" charset="-122"/>
-                <a:cs typeface="Consolas" pitchFamily="34" charset="-120"/>
-              </a:rPr>
-              <a:t>artist  VARCHAR(200)</a:t>
-            </a:r>
-            <a:endParaRPr lang="en-US" sz="850" dirty="0"/>
-          </a:p>
-        </p:txBody>
-      </p:sp>
-      <p:sp>
-        <p:nvSpPr>
-          <p:cNvPr id="22" name="Text 18"/>
-          <p:cNvSpPr/>
-          <p:nvPr/>
-        </p:nvSpPr>
-        <p:spPr>
-          <a:xfrm>
-            <a:off x="4800600" y="2786126"/>
-            <a:ext cx="3840480" cy="228600"/>
-          </a:xfrm>
-          <a:prstGeom prst="rect">
-            <a:avLst/>
-          </a:prstGeom>
-          <a:noFill/>
-          <a:ln/>
-        </p:spPr>
-        <p:txBody>
-          <a:bodyPr wrap="square" lIns="0" tIns="0" rIns="0" bIns="0" rtlCol="0" anchor="ctr"/>
-          <a:lstStyle/>
-          <a:p>
-            <a:pPr marL="0" indent="0">
-              <a:buNone/>
-            </a:pPr>
-            <a:r>
-              <a:rPr lang="en-US" sz="850" dirty="0">
-                <a:solidFill>
-                  <a:srgbClr val="8B949E"/>
-                </a:solidFill>
-                <a:latin typeface="Consolas" pitchFamily="34" charset="0"/>
-                <a:ea typeface="Consolas" pitchFamily="34" charset="-122"/>
-                <a:cs typeface="Consolas" pitchFamily="34" charset="-120"/>
-              </a:rPr>
-              <a:t>filename  VARCHAR(300)</a:t>
-            </a:r>
-            <a:endParaRPr lang="en-US" sz="850" dirty="0"/>
-          </a:p>
-        </p:txBody>
-      </p:sp>
-      <p:sp>
-        <p:nvSpPr>
-          <p:cNvPr id="23" name="Text 19"/>
-          <p:cNvSpPr/>
-          <p:nvPr/>
-        </p:nvSpPr>
-        <p:spPr>
-          <a:xfrm>
-            <a:off x="4800600" y="3033014"/>
-            <a:ext cx="3840480" cy="228600"/>
-          </a:xfrm>
-          <a:prstGeom prst="rect">
-            <a:avLst/>
-          </a:prstGeom>
-          <a:noFill/>
-          <a:ln/>
-        </p:spPr>
-        <p:txBody>
-          <a:bodyPr wrap="square" lIns="0" tIns="0" rIns="0" bIns="0" rtlCol="0" anchor="ctr"/>
-          <a:lstStyle/>
-          <a:p>
-            <a:pPr marL="0" indent="0">
-              <a:buNone/>
-            </a:pPr>
-            <a:r>
-              <a:rPr lang="en-US" sz="850" dirty="0">
-                <a:solidFill>
-                  <a:srgbClr val="8B949E"/>
-                </a:solidFill>
-                <a:latin typeface="Consolas" pitchFamily="34" charset="0"/>
-                <a:ea typeface="Consolas" pitchFamily="34" charset="-122"/>
-                <a:cs typeface="Consolas" pitchFamily="34" charset="-120"/>
-              </a:rPr>
-              <a:t>source  ENUM(upload,youtube)</a:t>
-            </a:r>
-            <a:endParaRPr lang="en-US" sz="850" dirty="0"/>
-          </a:p>
-        </p:txBody>
-      </p:sp>
-      <p:sp>
-        <p:nvSpPr>
           <p:cNvPr id="24" name="Text 20"/>
           <p:cNvSpPr/>
           <p:nvPr/>
@@ -27555,162 +28254,6 @@
       </p:sp>
       <p:sp>
         <p:nvSpPr>
-          <p:cNvPr id="29" name="Text 24"/>
-          <p:cNvSpPr/>
-          <p:nvPr/>
-        </p:nvSpPr>
-        <p:spPr>
-          <a:xfrm>
-            <a:off x="457200" y="3853180"/>
-            <a:ext cx="3840480" cy="228600"/>
-          </a:xfrm>
-          <a:prstGeom prst="rect">
-            <a:avLst/>
-          </a:prstGeom>
-          <a:noFill/>
-          <a:ln/>
-        </p:spPr>
-        <p:txBody>
-          <a:bodyPr wrap="square" lIns="0" tIns="0" rIns="0" bIns="0" rtlCol="0" anchor="ctr"/>
-          <a:lstStyle/>
-          <a:p>
-            <a:pPr marL="0" indent="0">
-              <a:buNone/>
-            </a:pPr>
-            <a:r>
-              <a:rPr lang="en-US" sz="850" dirty="0">
-                <a:solidFill>
-                  <a:srgbClr val="8B949E"/>
-                </a:solidFill>
-                <a:latin typeface="Consolas" pitchFamily="34" charset="0"/>
-                <a:ea typeface="Consolas" pitchFamily="34" charset="-122"/>
-                <a:cs typeface="Consolas" pitchFamily="34" charset="-120"/>
-              </a:rPr>
-              <a:t>id  INT PK AI</a:t>
-            </a:r>
-            <a:endParaRPr lang="en-US" sz="850" dirty="0"/>
-          </a:p>
-        </p:txBody>
-      </p:sp>
-      <p:sp>
-        <p:nvSpPr>
-          <p:cNvPr id="30" name="Text 25"/>
-          <p:cNvSpPr/>
-          <p:nvPr/>
-        </p:nvSpPr>
-        <p:spPr>
-          <a:xfrm>
-            <a:off x="457200" y="4100068"/>
-            <a:ext cx="3840480" cy="228600"/>
-          </a:xfrm>
-          <a:prstGeom prst="rect">
-            <a:avLst/>
-          </a:prstGeom>
-          <a:noFill/>
-          <a:ln/>
-        </p:spPr>
-        <p:txBody>
-          <a:bodyPr wrap="square" lIns="0" tIns="0" rIns="0" bIns="0" rtlCol="0" anchor="ctr"/>
-          <a:lstStyle/>
-          <a:p>
-            <a:pPr marL="0" indent="0">
-              <a:buNone/>
-            </a:pPr>
-            <a:r>
-              <a:rPr lang="en-US" sz="850" dirty="0">
-                <a:solidFill>
-                  <a:srgbClr val="8B949E"/>
-                </a:solidFill>
-                <a:latin typeface="Consolas" pitchFamily="34" charset="0"/>
-                <a:ea typeface="Consolas" pitchFamily="34" charset="-122"/>
-                <a:cs typeface="Consolas" pitchFamily="34" charset="-120"/>
-              </a:rPr>
-              <a:t>user_id  FK → users</a:t>
-            </a:r>
-            <a:endParaRPr lang="en-US" sz="850" dirty="0"/>
-          </a:p>
-        </p:txBody>
-      </p:sp>
-      <p:sp>
-        <p:nvSpPr>
-          <p:cNvPr id="31" name="Text 26"/>
-          <p:cNvSpPr/>
-          <p:nvPr/>
-        </p:nvSpPr>
-        <p:spPr>
-          <a:xfrm>
-            <a:off x="457200" y="4346956"/>
-            <a:ext cx="3840480" cy="228600"/>
-          </a:xfrm>
-          <a:prstGeom prst="rect">
-            <a:avLst/>
-          </a:prstGeom>
-          <a:noFill/>
-          <a:ln/>
-        </p:spPr>
-        <p:txBody>
-          <a:bodyPr wrap="square" lIns="0" tIns="0" rIns="0" bIns="0" rtlCol="0" anchor="ctr"/>
-          <a:lstStyle/>
-          <a:p>
-            <a:pPr marL="0" indent="0">
-              <a:buNone/>
-            </a:pPr>
-            <a:r>
-              <a:rPr lang="en-US" sz="850" dirty="0">
-                <a:solidFill>
-                  <a:srgbClr val="8B949E"/>
-                </a:solidFill>
-                <a:latin typeface="Consolas" pitchFamily="34" charset="0"/>
-                <a:ea typeface="Consolas" pitchFamily="34" charset="-122"/>
-                <a:cs typeface="Consolas" pitchFamily="34" charset="-120"/>
-              </a:rPr>
-              <a:t>name  VARCHAR(150)</a:t>
-            </a:r>
-            <a:endParaRPr lang="en-US" sz="850" dirty="0"/>
-          </a:p>
-        </p:txBody>
-      </p:sp>
-      <p:sp>
-        <p:nvSpPr>
-          <p:cNvPr id="32" name="Text 27"/>
-          <p:cNvSpPr/>
-          <p:nvPr/>
-        </p:nvSpPr>
-        <p:spPr>
-          <a:xfrm>
-            <a:off x="457200" y="4593844"/>
-            <a:ext cx="3840480" cy="228600"/>
-          </a:xfrm>
-          <a:prstGeom prst="rect">
-            <a:avLst/>
-          </a:prstGeom>
-          <a:noFill/>
-          <a:ln/>
-        </p:spPr>
-        <p:txBody>
-          <a:bodyPr wrap="square" lIns="0" tIns="0" rIns="0" bIns="0" rtlCol="0" anchor="ctr"/>
-          <a:lstStyle/>
-          <a:p>
-            <a:pPr marL="0" indent="0">
-              <a:buNone/>
-            </a:pPr>
-            <a:r>
-              <a:rPr lang="en-US" sz="850" dirty="0">
-                <a:solidFill>
-                  <a:srgbClr val="8B949E"/>
-                </a:solidFill>
-                <a:latin typeface="Consolas" pitchFamily="34" charset="0"/>
-                <a:ea typeface="Consolas" pitchFamily="34" charset="-122"/>
-                <a:cs typeface="Consolas" pitchFamily="34" charset="-120"/>
-              </a:rPr>
-              <a:t>created_at  DATETIME</a:t>
-            </a:r>
-            <a:endParaRPr lang="en-US" sz="850" dirty="0"/>
-          </a:p>
-        </p:txBody>
-      </p:sp>
-      <p:sp>
-        <p:nvSpPr>
           <p:cNvPr id="33" name="Shape 28"/>
           <p:cNvSpPr/>
           <p:nvPr/>
@@ -27835,13 +28378,19 @@
       </p:sp>
       <p:sp>
         <p:nvSpPr>
-          <p:cNvPr id="37" name="Text 31"/>
-          <p:cNvSpPr/>
-          <p:nvPr/>
-        </p:nvSpPr>
-        <p:spPr>
-          <a:xfrm>
-            <a:off x="4800600" y="3853180"/>
+          <p:cNvPr id="42" name="Text 8">
+            <a:extLst>
+              <a:ext uri="{FF2B5EF4-FFF2-40B4-BE49-F238E27FC236}">
+                <a16:creationId xmlns:a16="http://schemas.microsoft.com/office/drawing/2014/main" id="{BD2F85CE-A301-6F58-CA7F-5C49ADAFDDAF}"/>
+              </a:ext>
+            </a:extLst>
+          </p:cNvPr>
+          <p:cNvSpPr/>
+          <p:nvPr/>
+        </p:nvSpPr>
+        <p:spPr>
+          <a:xfrm>
+            <a:off x="457200" y="2369329"/>
             <a:ext cx="3840480" cy="228600"/>
           </a:xfrm>
           <a:prstGeom prst="rect">
@@ -27854,9 +28403,6 @@
           <a:bodyPr wrap="square" lIns="0" tIns="0" rIns="0" bIns="0" rtlCol="0" anchor="ctr"/>
           <a:lstStyle/>
           <a:p>
-            <a:pPr marL="0" indent="0">
-              <a:buNone/>
-            </a:pPr>
             <a:r>
               <a:rPr lang="en-US" sz="850" dirty="0">
                 <a:solidFill>
@@ -27866,7 +28412,7 @@
                 <a:ea typeface="Consolas" pitchFamily="34" charset="-122"/>
                 <a:cs typeface="Consolas" pitchFamily="34" charset="-120"/>
               </a:rPr>
-              <a:t>playlist_id  FK → playlists</a:t>
+              <a:t>role ENUM(USER/ADMIN)</a:t>
             </a:r>
             <a:endParaRPr lang="en-US" sz="850" dirty="0"/>
           </a:p>
@@ -27874,13 +28420,19 @@
       </p:sp>
       <p:sp>
         <p:nvSpPr>
-          <p:cNvPr id="38" name="Text 32"/>
-          <p:cNvSpPr/>
-          <p:nvPr/>
-        </p:nvSpPr>
-        <p:spPr>
-          <a:xfrm>
-            <a:off x="4800600" y="4100068"/>
+          <p:cNvPr id="43" name="Text 10">
+            <a:extLst>
+              <a:ext uri="{FF2B5EF4-FFF2-40B4-BE49-F238E27FC236}">
+                <a16:creationId xmlns:a16="http://schemas.microsoft.com/office/drawing/2014/main" id="{57EC1E49-D0EA-E7EC-4EE3-C8C99DCB3BCD}"/>
+              </a:ext>
+            </a:extLst>
+          </p:cNvPr>
+          <p:cNvSpPr/>
+          <p:nvPr/>
+        </p:nvSpPr>
+        <p:spPr>
+          <a:xfrm>
+            <a:off x="457200" y="2776237"/>
             <a:ext cx="3840480" cy="228600"/>
           </a:xfrm>
           <a:prstGeom prst="rect">
@@ -27897,7 +28449,7 @@
               <a:buNone/>
             </a:pPr>
             <a:r>
-              <a:rPr lang="en-US" sz="850" dirty="0">
+              <a:rPr lang="en-US" sz="850" dirty="0" err="1">
                 <a:solidFill>
                   <a:srgbClr val="8B949E"/>
                 </a:solidFill>
@@ -27905,36 +28457,8 @@
                 <a:ea typeface="Consolas" pitchFamily="34" charset="-122"/>
                 <a:cs typeface="Consolas" pitchFamily="34" charset="-120"/>
               </a:rPr>
-              <a:t>song_id  FK → songs</a:t>
-            </a:r>
-            <a:endParaRPr lang="en-US" sz="850" dirty="0"/>
-          </a:p>
-        </p:txBody>
-      </p:sp>
-      <p:sp>
-        <p:nvSpPr>
-          <p:cNvPr id="39" name="Text 33"/>
-          <p:cNvSpPr/>
-          <p:nvPr/>
-        </p:nvSpPr>
-        <p:spPr>
-          <a:xfrm>
-            <a:off x="4800600" y="4346956"/>
-            <a:ext cx="3840480" cy="228600"/>
-          </a:xfrm>
-          <a:prstGeom prst="rect">
-            <a:avLst/>
-          </a:prstGeom>
-          <a:noFill/>
-          <a:ln/>
-        </p:spPr>
-        <p:txBody>
-          <a:bodyPr wrap="square" lIns="0" tIns="0" rIns="0" bIns="0" rtlCol="0" anchor="ctr"/>
-          <a:lstStyle/>
-          <a:p>
-            <a:pPr marL="0" indent="0">
-              <a:buNone/>
-            </a:pPr>
+              <a:t>banned_until</a:t>
+            </a:r>
             <a:r>
               <a:rPr lang="en-US" sz="850" dirty="0">
                 <a:solidFill>
@@ -27944,7 +28468,7 @@
                 <a:ea typeface="Consolas" pitchFamily="34" charset="-122"/>
                 <a:cs typeface="Consolas" pitchFamily="34" charset="-120"/>
               </a:rPr>
-              <a:t>position  INT</a:t>
+              <a:t> DATETIME</a:t>
             </a:r>
             <a:endParaRPr lang="en-US" sz="850" dirty="0"/>
           </a:p>
@@ -27952,13 +28476,19 @@
       </p:sp>
       <p:sp>
         <p:nvSpPr>
-          <p:cNvPr id="40" name="Text 34"/>
-          <p:cNvSpPr/>
-          <p:nvPr/>
-        </p:nvSpPr>
-        <p:spPr>
-          <a:xfrm>
-            <a:off x="4800600" y="4593844"/>
+          <p:cNvPr id="44" name="Text 10">
+            <a:extLst>
+              <a:ext uri="{FF2B5EF4-FFF2-40B4-BE49-F238E27FC236}">
+                <a16:creationId xmlns:a16="http://schemas.microsoft.com/office/drawing/2014/main" id="{CA90855A-1769-A73E-4B29-0781593059EE}"/>
+              </a:ext>
+            </a:extLst>
+          </p:cNvPr>
+          <p:cNvSpPr/>
+          <p:nvPr/>
+        </p:nvSpPr>
+        <p:spPr>
+          <a:xfrm>
+            <a:off x="457200" y="3003667"/>
             <a:ext cx="3840480" cy="228600"/>
           </a:xfrm>
           <a:prstGeom prst="rect">
@@ -27975,7 +28505,7 @@
               <a:buNone/>
             </a:pPr>
             <a:r>
-              <a:rPr lang="en-US" sz="850" dirty="0">
+              <a:rPr lang="en-US" sz="850" dirty="0" err="1">
                 <a:solidFill>
                   <a:srgbClr val="8B949E"/>
                 </a:solidFill>
@@ -27983,7 +28513,893 @@
                 <a:ea typeface="Consolas" pitchFamily="34" charset="-122"/>
                 <a:cs typeface="Consolas" pitchFamily="34" charset="-120"/>
               </a:rPr>
-              <a:t>PRIMARY KEY (playlist_id, song_id)</a:t>
+              <a:t>created_at</a:t>
+            </a:r>
+            <a:r>
+              <a:rPr lang="en-US" sz="850" dirty="0">
+                <a:solidFill>
+                  <a:srgbClr val="8B949E"/>
+                </a:solidFill>
+                <a:latin typeface="Consolas" pitchFamily="34" charset="0"/>
+                <a:ea typeface="Consolas" pitchFamily="34" charset="-122"/>
+                <a:cs typeface="Consolas" pitchFamily="34" charset="-120"/>
+              </a:rPr>
+              <a:t> TIMESTAMP</a:t>
+            </a:r>
+            <a:endParaRPr lang="en-US" sz="850" dirty="0"/>
+          </a:p>
+        </p:txBody>
+      </p:sp>
+      <p:sp>
+        <p:nvSpPr>
+          <p:cNvPr id="45" name="Text 6">
+            <a:extLst>
+              <a:ext uri="{FF2B5EF4-FFF2-40B4-BE49-F238E27FC236}">
+                <a16:creationId xmlns:a16="http://schemas.microsoft.com/office/drawing/2014/main" id="{CF6E8FB4-6B4E-1CA7-48DD-B7E634D9B673}"/>
+              </a:ext>
+            </a:extLst>
+          </p:cNvPr>
+          <p:cNvSpPr/>
+          <p:nvPr/>
+        </p:nvSpPr>
+        <p:spPr>
+          <a:xfrm>
+            <a:off x="4754880" y="1718547"/>
+            <a:ext cx="3840480" cy="228600"/>
+          </a:xfrm>
+          <a:prstGeom prst="rect">
+            <a:avLst/>
+          </a:prstGeom>
+          <a:noFill/>
+          <a:ln/>
+        </p:spPr>
+        <p:txBody>
+          <a:bodyPr wrap="square" lIns="0" tIns="0" rIns="0" bIns="0" rtlCol="0" anchor="ctr"/>
+          <a:lstStyle/>
+          <a:p>
+            <a:pPr marL="0" indent="0">
+              <a:buNone/>
+            </a:pPr>
+            <a:r>
+              <a:rPr lang="en-US" sz="850" dirty="0">
+                <a:solidFill>
+                  <a:srgbClr val="8B949E"/>
+                </a:solidFill>
+                <a:latin typeface="Consolas" pitchFamily="34" charset="0"/>
+                <a:ea typeface="Consolas" pitchFamily="34" charset="-122"/>
+                <a:cs typeface="Consolas" pitchFamily="34" charset="-120"/>
+              </a:rPr>
+              <a:t>id  INT PK </a:t>
+            </a:r>
+            <a:endParaRPr lang="en-US" sz="850" dirty="0"/>
+          </a:p>
+        </p:txBody>
+      </p:sp>
+      <p:sp>
+        <p:nvSpPr>
+          <p:cNvPr id="46" name="Text 7">
+            <a:extLst>
+              <a:ext uri="{FF2B5EF4-FFF2-40B4-BE49-F238E27FC236}">
+                <a16:creationId xmlns:a16="http://schemas.microsoft.com/office/drawing/2014/main" id="{D18BAB68-A5AD-8951-3FE0-34DEA46C2D21}"/>
+              </a:ext>
+            </a:extLst>
+          </p:cNvPr>
+          <p:cNvSpPr/>
+          <p:nvPr/>
+        </p:nvSpPr>
+        <p:spPr>
+          <a:xfrm>
+            <a:off x="4754880" y="1947147"/>
+            <a:ext cx="3840480" cy="228600"/>
+          </a:xfrm>
+          <a:prstGeom prst="rect">
+            <a:avLst/>
+          </a:prstGeom>
+          <a:noFill/>
+          <a:ln/>
+        </p:spPr>
+        <p:txBody>
+          <a:bodyPr wrap="square" lIns="0" tIns="0" rIns="0" bIns="0" rtlCol="0" anchor="ctr"/>
+          <a:lstStyle/>
+          <a:p>
+            <a:pPr marL="0" indent="0">
+              <a:buNone/>
+            </a:pPr>
+            <a:r>
+              <a:rPr lang="en-US" sz="850" dirty="0">
+                <a:solidFill>
+                  <a:srgbClr val="8B949E"/>
+                </a:solidFill>
+                <a:latin typeface="Consolas" pitchFamily="34" charset="0"/>
+                <a:ea typeface="Consolas" pitchFamily="34" charset="-122"/>
+                <a:cs typeface="Consolas" pitchFamily="34" charset="-120"/>
+              </a:rPr>
+              <a:t>title  VARCHAR(255)</a:t>
+            </a:r>
+            <a:endParaRPr lang="en-US" sz="850" dirty="0"/>
+          </a:p>
+        </p:txBody>
+      </p:sp>
+      <p:sp>
+        <p:nvSpPr>
+          <p:cNvPr id="47" name="Text 7">
+            <a:extLst>
+              <a:ext uri="{FF2B5EF4-FFF2-40B4-BE49-F238E27FC236}">
+                <a16:creationId xmlns:a16="http://schemas.microsoft.com/office/drawing/2014/main" id="{D8C069DD-AB89-21FB-D7AF-192FE4B5DB52}"/>
+              </a:ext>
+            </a:extLst>
+          </p:cNvPr>
+          <p:cNvSpPr/>
+          <p:nvPr/>
+        </p:nvSpPr>
+        <p:spPr>
+          <a:xfrm>
+            <a:off x="4754880" y="2163200"/>
+            <a:ext cx="3840480" cy="228600"/>
+          </a:xfrm>
+          <a:prstGeom prst="rect">
+            <a:avLst/>
+          </a:prstGeom>
+          <a:noFill/>
+          <a:ln/>
+        </p:spPr>
+        <p:txBody>
+          <a:bodyPr wrap="square" lIns="0" tIns="0" rIns="0" bIns="0" rtlCol="0" anchor="ctr"/>
+          <a:lstStyle/>
+          <a:p>
+            <a:pPr marL="0" indent="0">
+              <a:buNone/>
+            </a:pPr>
+            <a:r>
+              <a:rPr lang="en-US" sz="850" dirty="0">
+                <a:solidFill>
+                  <a:srgbClr val="8B949E"/>
+                </a:solidFill>
+                <a:latin typeface="Consolas" pitchFamily="34" charset="0"/>
+                <a:ea typeface="Consolas" pitchFamily="34" charset="-122"/>
+                <a:cs typeface="Consolas" pitchFamily="34" charset="-120"/>
+              </a:rPr>
+              <a:t>filename  VARCHAR(255)</a:t>
+            </a:r>
+            <a:endParaRPr lang="en-US" sz="850" dirty="0"/>
+          </a:p>
+        </p:txBody>
+      </p:sp>
+      <p:sp>
+        <p:nvSpPr>
+          <p:cNvPr id="48" name="Text 7">
+            <a:extLst>
+              <a:ext uri="{FF2B5EF4-FFF2-40B4-BE49-F238E27FC236}">
+                <a16:creationId xmlns:a16="http://schemas.microsoft.com/office/drawing/2014/main" id="{6C58B091-25A3-A70E-3014-C43FAE3205ED}"/>
+              </a:ext>
+            </a:extLst>
+          </p:cNvPr>
+          <p:cNvSpPr/>
+          <p:nvPr/>
+        </p:nvSpPr>
+        <p:spPr>
+          <a:xfrm>
+            <a:off x="4754880" y="2393357"/>
+            <a:ext cx="3840480" cy="228600"/>
+          </a:xfrm>
+          <a:prstGeom prst="rect">
+            <a:avLst/>
+          </a:prstGeom>
+          <a:noFill/>
+          <a:ln/>
+        </p:spPr>
+        <p:txBody>
+          <a:bodyPr wrap="square" lIns="0" tIns="0" rIns="0" bIns="0" rtlCol="0" anchor="ctr"/>
+          <a:lstStyle/>
+          <a:p>
+            <a:pPr marL="0" indent="0">
+              <a:buNone/>
+            </a:pPr>
+            <a:r>
+              <a:rPr lang="en-US" sz="850" dirty="0" err="1">
+                <a:solidFill>
+                  <a:srgbClr val="8B949E"/>
+                </a:solidFill>
+                <a:latin typeface="Consolas" pitchFamily="34" charset="0"/>
+                <a:ea typeface="Consolas" pitchFamily="34" charset="-122"/>
+                <a:cs typeface="Consolas" pitchFamily="34" charset="-120"/>
+              </a:rPr>
+              <a:t>uploaded_by</a:t>
+            </a:r>
+            <a:r>
+              <a:rPr lang="en-US" sz="850" dirty="0">
+                <a:solidFill>
+                  <a:srgbClr val="8B949E"/>
+                </a:solidFill>
+                <a:latin typeface="Consolas" pitchFamily="34" charset="0"/>
+                <a:ea typeface="Consolas" pitchFamily="34" charset="-122"/>
+                <a:cs typeface="Consolas" pitchFamily="34" charset="-120"/>
+              </a:rPr>
+              <a:t>  VARCHAR(255)</a:t>
+            </a:r>
+            <a:endParaRPr lang="en-US" sz="850" dirty="0"/>
+          </a:p>
+        </p:txBody>
+      </p:sp>
+      <p:sp>
+        <p:nvSpPr>
+          <p:cNvPr id="49" name="Text 7">
+            <a:extLst>
+              <a:ext uri="{FF2B5EF4-FFF2-40B4-BE49-F238E27FC236}">
+                <a16:creationId xmlns:a16="http://schemas.microsoft.com/office/drawing/2014/main" id="{D25EEEF1-6FE5-717A-F2B2-111C38A13C51}"/>
+              </a:ext>
+            </a:extLst>
+          </p:cNvPr>
+          <p:cNvSpPr/>
+          <p:nvPr/>
+        </p:nvSpPr>
+        <p:spPr>
+          <a:xfrm>
+            <a:off x="4754880" y="2621957"/>
+            <a:ext cx="3840480" cy="228600"/>
+          </a:xfrm>
+          <a:prstGeom prst="rect">
+            <a:avLst/>
+          </a:prstGeom>
+          <a:noFill/>
+          <a:ln/>
+        </p:spPr>
+        <p:txBody>
+          <a:bodyPr wrap="square" lIns="0" tIns="0" rIns="0" bIns="0" rtlCol="0" anchor="ctr"/>
+          <a:lstStyle/>
+          <a:p>
+            <a:pPr marL="0" indent="0">
+              <a:buNone/>
+            </a:pPr>
+            <a:r>
+              <a:rPr lang="en-US" sz="850" dirty="0" err="1">
+                <a:solidFill>
+                  <a:srgbClr val="8B949E"/>
+                </a:solidFill>
+                <a:latin typeface="Consolas" pitchFamily="34" charset="0"/>
+                <a:ea typeface="Consolas" pitchFamily="34" charset="-122"/>
+                <a:cs typeface="Consolas" pitchFamily="34" charset="-120"/>
+              </a:rPr>
+              <a:t>youtube_video_id</a:t>
+            </a:r>
+            <a:r>
+              <a:rPr lang="en-US" sz="850" dirty="0">
+                <a:solidFill>
+                  <a:srgbClr val="8B949E"/>
+                </a:solidFill>
+                <a:latin typeface="Consolas" pitchFamily="34" charset="0"/>
+                <a:ea typeface="Consolas" pitchFamily="34" charset="-122"/>
+                <a:cs typeface="Consolas" pitchFamily="34" charset="-120"/>
+              </a:rPr>
+              <a:t>  VARCHAR(20)</a:t>
+            </a:r>
+            <a:endParaRPr lang="en-US" sz="850" dirty="0"/>
+          </a:p>
+        </p:txBody>
+      </p:sp>
+      <p:sp>
+        <p:nvSpPr>
+          <p:cNvPr id="50" name="Text 10">
+            <a:extLst>
+              <a:ext uri="{FF2B5EF4-FFF2-40B4-BE49-F238E27FC236}">
+                <a16:creationId xmlns:a16="http://schemas.microsoft.com/office/drawing/2014/main" id="{91B167E4-D041-DBC9-948D-4BFE95CC48BC}"/>
+              </a:ext>
+            </a:extLst>
+          </p:cNvPr>
+          <p:cNvSpPr/>
+          <p:nvPr/>
+        </p:nvSpPr>
+        <p:spPr>
+          <a:xfrm>
+            <a:off x="4754880" y="2803441"/>
+            <a:ext cx="3840480" cy="228600"/>
+          </a:xfrm>
+          <a:prstGeom prst="rect">
+            <a:avLst/>
+          </a:prstGeom>
+          <a:noFill/>
+          <a:ln/>
+        </p:spPr>
+        <p:txBody>
+          <a:bodyPr wrap="square" lIns="0" tIns="0" rIns="0" bIns="0" rtlCol="0" anchor="ctr"/>
+          <a:lstStyle/>
+          <a:p>
+            <a:pPr marL="0" indent="0">
+              <a:buNone/>
+            </a:pPr>
+            <a:r>
+              <a:rPr lang="en-US" sz="850" dirty="0">
+                <a:solidFill>
+                  <a:srgbClr val="8B949E"/>
+                </a:solidFill>
+                <a:latin typeface="Consolas" pitchFamily="34" charset="0"/>
+                <a:ea typeface="Consolas" pitchFamily="34" charset="-122"/>
+                <a:cs typeface="Consolas" pitchFamily="34" charset="-120"/>
+              </a:rPr>
+              <a:t>plays INT</a:t>
+            </a:r>
+            <a:endParaRPr lang="en-US" sz="850" dirty="0"/>
+          </a:p>
+        </p:txBody>
+      </p:sp>
+      <p:sp>
+        <p:nvSpPr>
+          <p:cNvPr id="51" name="Text 10">
+            <a:extLst>
+              <a:ext uri="{FF2B5EF4-FFF2-40B4-BE49-F238E27FC236}">
+                <a16:creationId xmlns:a16="http://schemas.microsoft.com/office/drawing/2014/main" id="{440D2884-BDF1-689E-93FF-AF8B80053BA7}"/>
+              </a:ext>
+            </a:extLst>
+          </p:cNvPr>
+          <p:cNvSpPr/>
+          <p:nvPr/>
+        </p:nvSpPr>
+        <p:spPr>
+          <a:xfrm>
+            <a:off x="4754880" y="3026897"/>
+            <a:ext cx="3840480" cy="228600"/>
+          </a:xfrm>
+          <a:prstGeom prst="rect">
+            <a:avLst/>
+          </a:prstGeom>
+          <a:noFill/>
+          <a:ln/>
+        </p:spPr>
+        <p:txBody>
+          <a:bodyPr wrap="square" lIns="0" tIns="0" rIns="0" bIns="0" rtlCol="0" anchor="ctr"/>
+          <a:lstStyle/>
+          <a:p>
+            <a:pPr marL="0" indent="0">
+              <a:buNone/>
+            </a:pPr>
+            <a:r>
+              <a:rPr lang="en-US" sz="850" dirty="0" err="1">
+                <a:solidFill>
+                  <a:srgbClr val="8B949E"/>
+                </a:solidFill>
+                <a:latin typeface="Consolas" pitchFamily="34" charset="0"/>
+                <a:ea typeface="Consolas" pitchFamily="34" charset="-122"/>
+                <a:cs typeface="Consolas" pitchFamily="34" charset="-120"/>
+              </a:rPr>
+              <a:t>created_at</a:t>
+            </a:r>
+            <a:r>
+              <a:rPr lang="en-US" sz="850" dirty="0">
+                <a:solidFill>
+                  <a:srgbClr val="8B949E"/>
+                </a:solidFill>
+                <a:latin typeface="Consolas" pitchFamily="34" charset="0"/>
+                <a:ea typeface="Consolas" pitchFamily="34" charset="-122"/>
+                <a:cs typeface="Consolas" pitchFamily="34" charset="-120"/>
+              </a:rPr>
+              <a:t> TIMESTAMP</a:t>
+            </a:r>
+            <a:endParaRPr lang="en-US" sz="850" dirty="0"/>
+          </a:p>
+        </p:txBody>
+      </p:sp>
+      <p:sp>
+        <p:nvSpPr>
+          <p:cNvPr id="52" name="Text 6">
+            <a:extLst>
+              <a:ext uri="{FF2B5EF4-FFF2-40B4-BE49-F238E27FC236}">
+                <a16:creationId xmlns:a16="http://schemas.microsoft.com/office/drawing/2014/main" id="{E731D3D4-98A5-86E2-7AF8-BBA74FEF2736}"/>
+              </a:ext>
+            </a:extLst>
+          </p:cNvPr>
+          <p:cNvSpPr/>
+          <p:nvPr/>
+        </p:nvSpPr>
+        <p:spPr>
+          <a:xfrm>
+            <a:off x="457200" y="3736088"/>
+            <a:ext cx="3840480" cy="228600"/>
+          </a:xfrm>
+          <a:prstGeom prst="rect">
+            <a:avLst/>
+          </a:prstGeom>
+          <a:noFill/>
+          <a:ln/>
+        </p:spPr>
+        <p:txBody>
+          <a:bodyPr wrap="square" lIns="0" tIns="0" rIns="0" bIns="0" rtlCol="0" anchor="ctr"/>
+          <a:lstStyle/>
+          <a:p>
+            <a:pPr marL="0" indent="0">
+              <a:buNone/>
+            </a:pPr>
+            <a:r>
+              <a:rPr lang="en-US" sz="850" dirty="0">
+                <a:solidFill>
+                  <a:srgbClr val="8B949E"/>
+                </a:solidFill>
+                <a:latin typeface="Consolas" pitchFamily="34" charset="0"/>
+                <a:ea typeface="Consolas" pitchFamily="34" charset="-122"/>
+                <a:cs typeface="Consolas" pitchFamily="34" charset="-120"/>
+              </a:rPr>
+              <a:t>id  INT PK </a:t>
+            </a:r>
+            <a:endParaRPr lang="en-US" sz="850" dirty="0"/>
+          </a:p>
+        </p:txBody>
+      </p:sp>
+      <p:sp>
+        <p:nvSpPr>
+          <p:cNvPr id="53" name="Text 7">
+            <a:extLst>
+              <a:ext uri="{FF2B5EF4-FFF2-40B4-BE49-F238E27FC236}">
+                <a16:creationId xmlns:a16="http://schemas.microsoft.com/office/drawing/2014/main" id="{4E09D5E4-06B3-99BD-2BCE-B2B38ABA2EEA}"/>
+              </a:ext>
+            </a:extLst>
+          </p:cNvPr>
+          <p:cNvSpPr/>
+          <p:nvPr/>
+        </p:nvSpPr>
+        <p:spPr>
+          <a:xfrm>
+            <a:off x="457200" y="3941828"/>
+            <a:ext cx="3840480" cy="228600"/>
+          </a:xfrm>
+          <a:prstGeom prst="rect">
+            <a:avLst/>
+          </a:prstGeom>
+          <a:noFill/>
+          <a:ln/>
+        </p:spPr>
+        <p:txBody>
+          <a:bodyPr wrap="square" lIns="0" tIns="0" rIns="0" bIns="0" rtlCol="0" anchor="ctr"/>
+          <a:lstStyle/>
+          <a:p>
+            <a:pPr marL="0" indent="0">
+              <a:buNone/>
+            </a:pPr>
+            <a:r>
+              <a:rPr lang="en-US" sz="850" dirty="0">
+                <a:solidFill>
+                  <a:srgbClr val="8B949E"/>
+                </a:solidFill>
+                <a:latin typeface="Consolas" pitchFamily="34" charset="0"/>
+                <a:ea typeface="Consolas" pitchFamily="34" charset="-122"/>
+                <a:cs typeface="Consolas" pitchFamily="34" charset="-120"/>
+              </a:rPr>
+              <a:t>name  VARCHAR(255)</a:t>
+            </a:r>
+            <a:endParaRPr lang="en-US" sz="850" dirty="0"/>
+          </a:p>
+        </p:txBody>
+      </p:sp>
+      <p:sp>
+        <p:nvSpPr>
+          <p:cNvPr id="54" name="Text 7">
+            <a:extLst>
+              <a:ext uri="{FF2B5EF4-FFF2-40B4-BE49-F238E27FC236}">
+                <a16:creationId xmlns:a16="http://schemas.microsoft.com/office/drawing/2014/main" id="{4D4EE4B1-4B8A-26BB-D602-B71859E60FB2}"/>
+              </a:ext>
+            </a:extLst>
+          </p:cNvPr>
+          <p:cNvSpPr/>
+          <p:nvPr/>
+        </p:nvSpPr>
+        <p:spPr>
+          <a:xfrm>
+            <a:off x="457200" y="4127500"/>
+            <a:ext cx="3840480" cy="228600"/>
+          </a:xfrm>
+          <a:prstGeom prst="rect">
+            <a:avLst/>
+          </a:prstGeom>
+          <a:noFill/>
+          <a:ln/>
+        </p:spPr>
+        <p:txBody>
+          <a:bodyPr wrap="square" lIns="0" tIns="0" rIns="0" bIns="0" rtlCol="0" anchor="ctr"/>
+          <a:lstStyle/>
+          <a:p>
+            <a:pPr marL="0" indent="0">
+              <a:buNone/>
+            </a:pPr>
+            <a:r>
+              <a:rPr lang="en-US" sz="850" dirty="0" err="1">
+                <a:solidFill>
+                  <a:srgbClr val="8B949E"/>
+                </a:solidFill>
+                <a:latin typeface="Consolas" pitchFamily="34" charset="0"/>
+                <a:ea typeface="Consolas" pitchFamily="34" charset="-122"/>
+                <a:cs typeface="Consolas" pitchFamily="34" charset="-120"/>
+              </a:rPr>
+              <a:t>user_id</a:t>
+            </a:r>
+            <a:r>
+              <a:rPr lang="en-US" sz="850" dirty="0">
+                <a:solidFill>
+                  <a:srgbClr val="8B949E"/>
+                </a:solidFill>
+                <a:latin typeface="Consolas" pitchFamily="34" charset="0"/>
+                <a:ea typeface="Consolas" pitchFamily="34" charset="-122"/>
+                <a:cs typeface="Consolas" pitchFamily="34" charset="-120"/>
+              </a:rPr>
+              <a:t>  VARCHAR(255)</a:t>
+            </a:r>
+            <a:endParaRPr lang="en-US" sz="850" dirty="0"/>
+          </a:p>
+        </p:txBody>
+      </p:sp>
+      <p:sp>
+        <p:nvSpPr>
+          <p:cNvPr id="55" name="Text 7">
+            <a:extLst>
+              <a:ext uri="{FF2B5EF4-FFF2-40B4-BE49-F238E27FC236}">
+                <a16:creationId xmlns:a16="http://schemas.microsoft.com/office/drawing/2014/main" id="{A7AC9A11-7D47-2065-1E4C-DF0C5E9242E4}"/>
+              </a:ext>
+            </a:extLst>
+          </p:cNvPr>
+          <p:cNvSpPr/>
+          <p:nvPr/>
+        </p:nvSpPr>
+        <p:spPr>
+          <a:xfrm>
+            <a:off x="457200" y="4328523"/>
+            <a:ext cx="3840480" cy="228600"/>
+          </a:xfrm>
+          <a:prstGeom prst="rect">
+            <a:avLst/>
+          </a:prstGeom>
+          <a:noFill/>
+          <a:ln/>
+        </p:spPr>
+        <p:txBody>
+          <a:bodyPr wrap="square" lIns="0" tIns="0" rIns="0" bIns="0" rtlCol="0" anchor="ctr"/>
+          <a:lstStyle/>
+          <a:p>
+            <a:pPr marL="0" indent="0">
+              <a:buNone/>
+            </a:pPr>
+            <a:r>
+              <a:rPr lang="en-US" sz="850" dirty="0" err="1">
+                <a:solidFill>
+                  <a:srgbClr val="8B949E"/>
+                </a:solidFill>
+                <a:latin typeface="Consolas" pitchFamily="34" charset="0"/>
+                <a:ea typeface="Consolas" pitchFamily="34" charset="-122"/>
+                <a:cs typeface="Consolas" pitchFamily="34" charset="-120"/>
+              </a:rPr>
+              <a:t>youtube_url</a:t>
+            </a:r>
+            <a:r>
+              <a:rPr lang="en-US" sz="850" dirty="0">
+                <a:solidFill>
+                  <a:srgbClr val="8B949E"/>
+                </a:solidFill>
+                <a:latin typeface="Consolas" pitchFamily="34" charset="0"/>
+                <a:ea typeface="Consolas" pitchFamily="34" charset="-122"/>
+                <a:cs typeface="Consolas" pitchFamily="34" charset="-120"/>
+              </a:rPr>
+              <a:t> VARCHAR(500)</a:t>
+            </a:r>
+            <a:endParaRPr lang="en-US" sz="850" dirty="0"/>
+          </a:p>
+        </p:txBody>
+      </p:sp>
+      <p:sp>
+        <p:nvSpPr>
+          <p:cNvPr id="56" name="Text 7">
+            <a:extLst>
+              <a:ext uri="{FF2B5EF4-FFF2-40B4-BE49-F238E27FC236}">
+                <a16:creationId xmlns:a16="http://schemas.microsoft.com/office/drawing/2014/main" id="{2A19F009-0C47-2B61-4BF1-7475821F820F}"/>
+              </a:ext>
+            </a:extLst>
+          </p:cNvPr>
+          <p:cNvSpPr/>
+          <p:nvPr/>
+        </p:nvSpPr>
+        <p:spPr>
+          <a:xfrm>
+            <a:off x="457200" y="4514195"/>
+            <a:ext cx="3840480" cy="228600"/>
+          </a:xfrm>
+          <a:prstGeom prst="rect">
+            <a:avLst/>
+          </a:prstGeom>
+          <a:noFill/>
+          <a:ln/>
+        </p:spPr>
+        <p:txBody>
+          <a:bodyPr wrap="square" lIns="0" tIns="0" rIns="0" bIns="0" rtlCol="0" anchor="ctr"/>
+          <a:lstStyle/>
+          <a:p>
+            <a:pPr marL="0" indent="0">
+              <a:buNone/>
+            </a:pPr>
+            <a:r>
+              <a:rPr lang="en-US" sz="850" dirty="0" err="1">
+                <a:solidFill>
+                  <a:srgbClr val="8B949E"/>
+                </a:solidFill>
+                <a:latin typeface="Consolas" pitchFamily="34" charset="0"/>
+                <a:ea typeface="Consolas" pitchFamily="34" charset="-122"/>
+                <a:cs typeface="Consolas" pitchFamily="34" charset="-120"/>
+              </a:rPr>
+              <a:t>youtube_playlist_id</a:t>
+            </a:r>
+            <a:r>
+              <a:rPr lang="en-US" sz="850" dirty="0">
+                <a:solidFill>
+                  <a:srgbClr val="8B949E"/>
+                </a:solidFill>
+                <a:latin typeface="Consolas" pitchFamily="34" charset="0"/>
+                <a:ea typeface="Consolas" pitchFamily="34" charset="-122"/>
+                <a:cs typeface="Consolas" pitchFamily="34" charset="-120"/>
+              </a:rPr>
+              <a:t> VARCHAR(100)</a:t>
+            </a:r>
+            <a:endParaRPr lang="en-US" sz="850" dirty="0"/>
+          </a:p>
+        </p:txBody>
+      </p:sp>
+      <p:sp>
+        <p:nvSpPr>
+          <p:cNvPr id="57" name="Text 7">
+            <a:extLst>
+              <a:ext uri="{FF2B5EF4-FFF2-40B4-BE49-F238E27FC236}">
+                <a16:creationId xmlns:a16="http://schemas.microsoft.com/office/drawing/2014/main" id="{38F4F3F3-47CE-50BD-3EF0-C40890DEF8CE}"/>
+              </a:ext>
+            </a:extLst>
+          </p:cNvPr>
+          <p:cNvSpPr/>
+          <p:nvPr/>
+        </p:nvSpPr>
+        <p:spPr>
+          <a:xfrm>
+            <a:off x="457200" y="4704913"/>
+            <a:ext cx="3840480" cy="228600"/>
+          </a:xfrm>
+          <a:prstGeom prst="rect">
+            <a:avLst/>
+          </a:prstGeom>
+          <a:noFill/>
+          <a:ln/>
+        </p:spPr>
+        <p:txBody>
+          <a:bodyPr wrap="square" lIns="0" tIns="0" rIns="0" bIns="0" rtlCol="0" anchor="ctr"/>
+          <a:lstStyle/>
+          <a:p>
+            <a:pPr marL="0" indent="0">
+              <a:buNone/>
+            </a:pPr>
+            <a:r>
+              <a:rPr lang="en-US" sz="850" dirty="0" err="1">
+                <a:solidFill>
+                  <a:srgbClr val="8B949E"/>
+                </a:solidFill>
+                <a:latin typeface="Consolas" pitchFamily="34" charset="0"/>
+                <a:ea typeface="Consolas" pitchFamily="34" charset="-122"/>
+                <a:cs typeface="Consolas" pitchFamily="34" charset="-120"/>
+              </a:rPr>
+              <a:t>last_synced</a:t>
+            </a:r>
+            <a:r>
+              <a:rPr lang="en-US" sz="850" dirty="0">
+                <a:solidFill>
+                  <a:srgbClr val="8B949E"/>
+                </a:solidFill>
+                <a:latin typeface="Consolas" pitchFamily="34" charset="0"/>
+                <a:ea typeface="Consolas" pitchFamily="34" charset="-122"/>
+                <a:cs typeface="Consolas" pitchFamily="34" charset="-120"/>
+              </a:rPr>
+              <a:t> DATETIME</a:t>
+            </a:r>
+            <a:endParaRPr lang="en-US" sz="850" dirty="0"/>
+          </a:p>
+        </p:txBody>
+      </p:sp>
+      <p:sp>
+        <p:nvSpPr>
+          <p:cNvPr id="58" name="Text 10">
+            <a:extLst>
+              <a:ext uri="{FF2B5EF4-FFF2-40B4-BE49-F238E27FC236}">
+                <a16:creationId xmlns:a16="http://schemas.microsoft.com/office/drawing/2014/main" id="{F06C5907-B9B2-5B8D-F5BC-46DE6DE7BEEE}"/>
+              </a:ext>
+            </a:extLst>
+          </p:cNvPr>
+          <p:cNvSpPr/>
+          <p:nvPr/>
+        </p:nvSpPr>
+        <p:spPr>
+          <a:xfrm>
+            <a:off x="457200" y="4852703"/>
+            <a:ext cx="3840480" cy="228600"/>
+          </a:xfrm>
+          <a:prstGeom prst="rect">
+            <a:avLst/>
+          </a:prstGeom>
+          <a:noFill/>
+          <a:ln/>
+        </p:spPr>
+        <p:txBody>
+          <a:bodyPr wrap="square" lIns="0" tIns="0" rIns="0" bIns="0" rtlCol="0" anchor="ctr"/>
+          <a:lstStyle/>
+          <a:p>
+            <a:pPr marL="0" indent="0">
+              <a:buNone/>
+            </a:pPr>
+            <a:r>
+              <a:rPr lang="en-US" sz="850" dirty="0" err="1">
+                <a:solidFill>
+                  <a:srgbClr val="8B949E"/>
+                </a:solidFill>
+                <a:latin typeface="Consolas" pitchFamily="34" charset="0"/>
+                <a:ea typeface="Consolas" pitchFamily="34" charset="-122"/>
+                <a:cs typeface="Consolas" pitchFamily="34" charset="-120"/>
+              </a:rPr>
+              <a:t>created_at</a:t>
+            </a:r>
+            <a:r>
+              <a:rPr lang="en-US" sz="850" dirty="0">
+                <a:solidFill>
+                  <a:srgbClr val="8B949E"/>
+                </a:solidFill>
+                <a:latin typeface="Consolas" pitchFamily="34" charset="0"/>
+                <a:ea typeface="Consolas" pitchFamily="34" charset="-122"/>
+                <a:cs typeface="Consolas" pitchFamily="34" charset="-120"/>
+              </a:rPr>
+              <a:t> TIMESTAMP</a:t>
+            </a:r>
+            <a:endParaRPr lang="en-US" sz="850" dirty="0"/>
+          </a:p>
+        </p:txBody>
+      </p:sp>
+      <p:sp>
+        <p:nvSpPr>
+          <p:cNvPr id="59" name="Text 6">
+            <a:extLst>
+              <a:ext uri="{FF2B5EF4-FFF2-40B4-BE49-F238E27FC236}">
+                <a16:creationId xmlns:a16="http://schemas.microsoft.com/office/drawing/2014/main" id="{30723BF8-8F9B-E192-4818-BC270DC97012}"/>
+              </a:ext>
+            </a:extLst>
+          </p:cNvPr>
+          <p:cNvSpPr/>
+          <p:nvPr/>
+        </p:nvSpPr>
+        <p:spPr>
+          <a:xfrm>
+            <a:off x="4754880" y="3781808"/>
+            <a:ext cx="3840480" cy="228600"/>
+          </a:xfrm>
+          <a:prstGeom prst="rect">
+            <a:avLst/>
+          </a:prstGeom>
+          <a:noFill/>
+          <a:ln/>
+        </p:spPr>
+        <p:txBody>
+          <a:bodyPr wrap="square" lIns="0" tIns="0" rIns="0" bIns="0" rtlCol="0" anchor="ctr"/>
+          <a:lstStyle/>
+          <a:p>
+            <a:pPr marL="0" indent="0">
+              <a:buNone/>
+            </a:pPr>
+            <a:r>
+              <a:rPr lang="en-US" sz="850" dirty="0">
+                <a:solidFill>
+                  <a:srgbClr val="8B949E"/>
+                </a:solidFill>
+                <a:latin typeface="Consolas" pitchFamily="34" charset="0"/>
+                <a:ea typeface="Consolas" pitchFamily="34" charset="-122"/>
+                <a:cs typeface="Consolas" pitchFamily="34" charset="-120"/>
+              </a:rPr>
+              <a:t>id  INT PK </a:t>
+            </a:r>
+            <a:endParaRPr lang="en-US" sz="850" dirty="0"/>
+          </a:p>
+        </p:txBody>
+      </p:sp>
+      <p:sp>
+        <p:nvSpPr>
+          <p:cNvPr id="60" name="Text 10">
+            <a:extLst>
+              <a:ext uri="{FF2B5EF4-FFF2-40B4-BE49-F238E27FC236}">
+                <a16:creationId xmlns:a16="http://schemas.microsoft.com/office/drawing/2014/main" id="{5A3D4D2D-AEB6-3C56-A8D7-454DF69CB32E}"/>
+              </a:ext>
+            </a:extLst>
+          </p:cNvPr>
+          <p:cNvSpPr/>
+          <p:nvPr/>
+        </p:nvSpPr>
+        <p:spPr>
+          <a:xfrm>
+            <a:off x="4747042" y="3981577"/>
+            <a:ext cx="3840480" cy="228600"/>
+          </a:xfrm>
+          <a:prstGeom prst="rect">
+            <a:avLst/>
+          </a:prstGeom>
+          <a:noFill/>
+          <a:ln/>
+        </p:spPr>
+        <p:txBody>
+          <a:bodyPr wrap="square" lIns="0" tIns="0" rIns="0" bIns="0" rtlCol="0" anchor="ctr"/>
+          <a:lstStyle/>
+          <a:p>
+            <a:pPr marL="0" indent="0">
+              <a:buNone/>
+            </a:pPr>
+            <a:r>
+              <a:rPr lang="en-US" sz="850" dirty="0" err="1">
+                <a:solidFill>
+                  <a:srgbClr val="8B949E"/>
+                </a:solidFill>
+                <a:latin typeface="Consolas" pitchFamily="34" charset="0"/>
+                <a:ea typeface="Consolas" pitchFamily="34" charset="-122"/>
+                <a:cs typeface="Consolas" pitchFamily="34" charset="-120"/>
+              </a:rPr>
+              <a:t>playlist_id</a:t>
+            </a:r>
+            <a:r>
+              <a:rPr lang="en-US" sz="850" dirty="0">
+                <a:solidFill>
+                  <a:srgbClr val="8B949E"/>
+                </a:solidFill>
+                <a:latin typeface="Consolas" pitchFamily="34" charset="0"/>
+                <a:ea typeface="Consolas" pitchFamily="34" charset="-122"/>
+                <a:cs typeface="Consolas" pitchFamily="34" charset="-120"/>
+              </a:rPr>
+              <a:t> INT</a:t>
+            </a:r>
+            <a:endParaRPr lang="en-US" sz="850" dirty="0"/>
+          </a:p>
+        </p:txBody>
+      </p:sp>
+      <p:sp>
+        <p:nvSpPr>
+          <p:cNvPr id="61" name="Text 10">
+            <a:extLst>
+              <a:ext uri="{FF2B5EF4-FFF2-40B4-BE49-F238E27FC236}">
+                <a16:creationId xmlns:a16="http://schemas.microsoft.com/office/drawing/2014/main" id="{CBD2D7F5-64E4-5794-C8D2-4BE4DA45E8DB}"/>
+              </a:ext>
+            </a:extLst>
+          </p:cNvPr>
+          <p:cNvSpPr/>
+          <p:nvPr/>
+        </p:nvSpPr>
+        <p:spPr>
+          <a:xfrm>
+            <a:off x="4754880" y="4190746"/>
+            <a:ext cx="3840480" cy="228600"/>
+          </a:xfrm>
+          <a:prstGeom prst="rect">
+            <a:avLst/>
+          </a:prstGeom>
+          <a:noFill/>
+          <a:ln/>
+        </p:spPr>
+        <p:txBody>
+          <a:bodyPr wrap="square" lIns="0" tIns="0" rIns="0" bIns="0" rtlCol="0" anchor="ctr"/>
+          <a:lstStyle/>
+          <a:p>
+            <a:pPr marL="0" indent="0">
+              <a:buNone/>
+            </a:pPr>
+            <a:r>
+              <a:rPr lang="en-US" sz="850" dirty="0" err="1">
+                <a:solidFill>
+                  <a:srgbClr val="8B949E"/>
+                </a:solidFill>
+                <a:latin typeface="Consolas" pitchFamily="34" charset="0"/>
+                <a:ea typeface="Consolas" pitchFamily="34" charset="-122"/>
+                <a:cs typeface="Consolas" pitchFamily="34" charset="-120"/>
+              </a:rPr>
+              <a:t>song_id</a:t>
+            </a:r>
+            <a:r>
+              <a:rPr lang="en-US" sz="850" dirty="0">
+                <a:solidFill>
+                  <a:srgbClr val="8B949E"/>
+                </a:solidFill>
+                <a:latin typeface="Consolas" pitchFamily="34" charset="0"/>
+                <a:ea typeface="Consolas" pitchFamily="34" charset="-122"/>
+                <a:cs typeface="Consolas" pitchFamily="34" charset="-120"/>
+              </a:rPr>
+              <a:t> INT</a:t>
             </a:r>
             <a:endParaRPr lang="en-US" sz="850" dirty="0"/>
           </a:p>
@@ -28465,7 +29881,18 @@
                 <a:ea typeface="Calibri" pitchFamily="34" charset="-122"/>
                 <a:cs typeface="Calibri" pitchFamily="34" charset="-120"/>
               </a:rPr>
-              <a:t>Petición POST /download</a:t>
+              <a:t>Petición POST /</a:t>
+            </a:r>
+            <a:r>
+              <a:rPr lang="en-US" sz="1050" b="1" dirty="0" err="1">
+                <a:solidFill>
+                  <a:srgbClr val="FFFFFF"/>
+                </a:solidFill>
+                <a:latin typeface="Calibri" pitchFamily="34" charset="0"/>
+                <a:ea typeface="Calibri" pitchFamily="34" charset="-122"/>
+                <a:cs typeface="Calibri" pitchFamily="34" charset="-120"/>
+              </a:rPr>
+              <a:t>youtube_download</a:t>
             </a:r>
             <a:endParaRPr lang="en-US" sz="1050" dirty="0"/>
           </a:p>
@@ -29038,7 +30465,29 @@
                 <a:ea typeface="Calibri" pitchFamily="34" charset="-122"/>
                 <a:cs typeface="Calibri" pitchFamily="34" charset="-120"/>
               </a:rPr>
-              <a:t>Se crea una entrada en la tabla songs con source='youtube'.</a:t>
+              <a:t>Se crea una entrada en la </a:t>
+            </a:r>
+            <a:r>
+              <a:rPr lang="en-US" sz="950" dirty="0" err="1">
+                <a:solidFill>
+                  <a:srgbClr val="8B949E"/>
+                </a:solidFill>
+                <a:latin typeface="Calibri" pitchFamily="34" charset="0"/>
+                <a:ea typeface="Calibri" pitchFamily="34" charset="-122"/>
+                <a:cs typeface="Calibri" pitchFamily="34" charset="-120"/>
+              </a:rPr>
+              <a:t>tabla</a:t>
+            </a:r>
+            <a:r>
+              <a:rPr lang="en-US" sz="950" dirty="0">
+                <a:solidFill>
+                  <a:srgbClr val="8B949E"/>
+                </a:solidFill>
+                <a:latin typeface="Calibri" pitchFamily="34" charset="0"/>
+                <a:ea typeface="Calibri" pitchFamily="34" charset="-122"/>
+                <a:cs typeface="Calibri" pitchFamily="34" charset="-120"/>
+              </a:rPr>
+              <a:t> songs.</a:t>
             </a:r>
             <a:endParaRPr lang="en-US" sz="950" dirty="0"/>
           </a:p>
@@ -29216,7 +30665,18 @@
                 <a:ea typeface="Calibri" pitchFamily="34" charset="-122"/>
                 <a:cs typeface="Calibri" pitchFamily="34" charset="-120"/>
               </a:rPr>
-              <a:t>El usuario puede escuchar la canción inmediatamente vía /stream/&lt;id&gt;.</a:t>
+              <a:t>El usuario puede escuchar la canción </a:t>
+            </a:r>
+            <a:r>
+              <a:rPr lang="en-US" sz="950" dirty="0" err="1">
+                <a:solidFill>
+                  <a:srgbClr val="8B949E"/>
+                </a:solidFill>
+                <a:latin typeface="Calibri" pitchFamily="34" charset="0"/>
+                <a:ea typeface="Calibri" pitchFamily="34" charset="-122"/>
+                <a:cs typeface="Calibri" pitchFamily="34" charset="-120"/>
+              </a:rPr>
+              <a:t>inmediatamente</a:t>
             </a:r>
             <a:endParaRPr lang="en-US" sz="950" dirty="0"/>
           </a:p>
